--- a/腳步.pptx
+++ b/腳步.pptx
@@ -5,14 +5,19 @@
     <p:sldMasterId id="2147483672" r:id="rId1"/>
   </p:sldMasterIdLst>
   <p:sldIdLst>
-    <p:sldId id="256" r:id="rId2"/>
-    <p:sldId id="257" r:id="rId3"/>
-    <p:sldId id="258" r:id="rId4"/>
-    <p:sldId id="259" r:id="rId5"/>
-    <p:sldId id="260" r:id="rId6"/>
-    <p:sldId id="261" r:id="rId7"/>
+    <p:sldId id="263" r:id="rId2"/>
+    <p:sldId id="264" r:id="rId3"/>
+    <p:sldId id="265" r:id="rId4"/>
+    <p:sldId id="266" r:id="rId5"/>
+    <p:sldId id="267" r:id="rId6"/>
+    <p:sldId id="268" r:id="rId7"/>
+    <p:sldId id="269" r:id="rId8"/>
+    <p:sldId id="270" r:id="rId9"/>
+    <p:sldId id="271" r:id="rId10"/>
+    <p:sldId id="272" r:id="rId11"/>
+    <p:sldId id="273" r:id="rId12"/>
   </p:sldIdLst>
-  <p:sldSz cx="9144000" cy="6858000" type="screen4x3"/>
+  <p:sldSz cx="12192000" cy="6858000"/>
   <p:notesSz cx="6858000" cy="9144000"/>
   <p:defaultTextStyle>
     <a:defPPr>
@@ -109,6 +114,22 @@
       </a:defRPr>
     </a:lvl9pPr>
   </p:defaultTextStyle>
+  <p:extLst>
+    <p:ext uri="{EFAFB233-063F-42B5-8137-9DF3F51BA10A}">
+      <p15:sldGuideLst xmlns:p15="http://schemas.microsoft.com/office/powerpoint/2012/main">
+        <p15:guide id="1" orient="horz" pos="2160" userDrawn="1">
+          <p15:clr>
+            <a:srgbClr val="A4A3A4"/>
+          </p15:clr>
+        </p15:guide>
+        <p15:guide id="2" pos="3840" userDrawn="1">
+          <p15:clr>
+            <a:srgbClr val="A4A3A4"/>
+          </p15:clr>
+        </p15:guide>
+      </p15:sldGuideLst>
+    </p:ext>
+  </p:extLst>
 </p:presentation>
 </file>
 
@@ -141,8 +162,8 @@
         </p:nvSpPr>
         <p:spPr>
           <a:xfrm>
-            <a:off x="685800" y="2130425"/>
-            <a:ext cx="7772400" cy="1470025"/>
+            <a:off x="914400" y="2130426"/>
+            <a:ext cx="10363200" cy="1470025"/>
           </a:xfrm>
         </p:spPr>
         <p:txBody>
@@ -150,10 +171,9 @@
           <a:lstStyle/>
           <a:p>
             <a:r>
-              <a:rPr lang="zh-TW" altLang="en-US" smtClean="0"/>
+              <a:rPr lang="zh-TW" altLang="en-US"/>
               <a:t>按一下以編輯母片標題樣式</a:t>
             </a:r>
-            <a:endParaRPr lang="zh-TW" altLang="en-US"/>
           </a:p>
         </p:txBody>
       </p:sp>
@@ -169,8 +189,8 @@
         </p:nvSpPr>
         <p:spPr>
           <a:xfrm>
-            <a:off x="1371600" y="3886200"/>
-            <a:ext cx="6400800" cy="1752600"/>
+            <a:off x="1828800" y="3886200"/>
+            <a:ext cx="8534400" cy="1752600"/>
           </a:xfrm>
         </p:spPr>
         <p:txBody>
@@ -269,10 +289,9 @@
           </a:lstStyle>
           <a:p>
             <a:r>
-              <a:rPr lang="zh-TW" altLang="en-US" smtClean="0"/>
+              <a:rPr lang="zh-TW" altLang="en-US"/>
               <a:t>按一下以編輯母片副標題樣式</a:t>
             </a:r>
-            <a:endParaRPr lang="zh-TW" altLang="en-US"/>
           </a:p>
         </p:txBody>
       </p:sp>
@@ -294,7 +313,7 @@
             <a:fld id="{0E81C37E-70E7-48DF-B3C5-187CCDBE83A5}" type="datetimeFigureOut">
               <a:rPr lang="zh-TW" altLang="en-US" smtClean="0"/>
               <a:pPr/>
-              <a:t>2017/12/23</a:t>
+              <a:t>2024/4/25</a:t>
             </a:fld>
             <a:endParaRPr lang="zh-TW" altLang="en-US"/>
           </a:p>
@@ -384,10 +403,9 @@
           <a:lstStyle/>
           <a:p>
             <a:r>
-              <a:rPr lang="zh-TW" altLang="en-US" smtClean="0"/>
+              <a:rPr lang="zh-TW" altLang="en-US"/>
               <a:t>按一下以編輯母片標題樣式</a:t>
             </a:r>
-            <a:endParaRPr lang="zh-TW" altLang="en-US"/>
           </a:p>
         </p:txBody>
       </p:sp>
@@ -408,38 +426,37 @@
           <a:p>
             <a:pPr lvl="0"/>
             <a:r>
-              <a:rPr lang="zh-TW" altLang="en-US" smtClean="0"/>
+              <a:rPr lang="zh-TW" altLang="en-US"/>
               <a:t>按一下以編輯母片文字樣式</a:t>
             </a:r>
           </a:p>
           <a:p>
             <a:pPr lvl="1"/>
             <a:r>
-              <a:rPr lang="zh-TW" altLang="en-US" smtClean="0"/>
+              <a:rPr lang="zh-TW" altLang="en-US"/>
               <a:t>第二層</a:t>
             </a:r>
           </a:p>
           <a:p>
             <a:pPr lvl="2"/>
             <a:r>
-              <a:rPr lang="zh-TW" altLang="en-US" smtClean="0"/>
+              <a:rPr lang="zh-TW" altLang="en-US"/>
               <a:t>第三層</a:t>
             </a:r>
           </a:p>
           <a:p>
             <a:pPr lvl="3"/>
             <a:r>
-              <a:rPr lang="zh-TW" altLang="en-US" smtClean="0"/>
+              <a:rPr lang="zh-TW" altLang="en-US"/>
               <a:t>第四層</a:t>
             </a:r>
           </a:p>
           <a:p>
             <a:pPr lvl="4"/>
             <a:r>
-              <a:rPr lang="zh-TW" altLang="en-US" smtClean="0"/>
+              <a:rPr lang="zh-TW" altLang="en-US"/>
               <a:t>第五層</a:t>
             </a:r>
-            <a:endParaRPr lang="zh-TW" altLang="en-US"/>
           </a:p>
         </p:txBody>
       </p:sp>
@@ -461,7 +478,7 @@
             <a:fld id="{0E81C37E-70E7-48DF-B3C5-187CCDBE83A5}" type="datetimeFigureOut">
               <a:rPr lang="zh-TW" altLang="en-US" smtClean="0"/>
               <a:pPr/>
-              <a:t>2017/12/23</a:t>
+              <a:t>2024/4/25</a:t>
             </a:fld>
             <a:endParaRPr lang="zh-TW" altLang="en-US"/>
           </a:p>
@@ -547,8 +564,8 @@
         </p:nvSpPr>
         <p:spPr>
           <a:xfrm>
-            <a:off x="6629400" y="274638"/>
-            <a:ext cx="2057400" cy="5851525"/>
+            <a:off x="8839200" y="274639"/>
+            <a:ext cx="2743200" cy="5851525"/>
           </a:xfrm>
         </p:spPr>
         <p:txBody>
@@ -556,10 +573,9 @@
           <a:lstStyle/>
           <a:p>
             <a:r>
-              <a:rPr lang="zh-TW" altLang="en-US" smtClean="0"/>
+              <a:rPr lang="zh-TW" altLang="en-US"/>
               <a:t>按一下以編輯母片標題樣式</a:t>
             </a:r>
-            <a:endParaRPr lang="zh-TW" altLang="en-US"/>
           </a:p>
         </p:txBody>
       </p:sp>
@@ -575,8 +591,8 @@
         </p:nvSpPr>
         <p:spPr>
           <a:xfrm>
-            <a:off x="457200" y="274638"/>
-            <a:ext cx="6019800" cy="5851525"/>
+            <a:off x="609600" y="274639"/>
+            <a:ext cx="8026400" cy="5851525"/>
           </a:xfrm>
         </p:spPr>
         <p:txBody>
@@ -585,38 +601,37 @@
           <a:p>
             <a:pPr lvl="0"/>
             <a:r>
-              <a:rPr lang="zh-TW" altLang="en-US" smtClean="0"/>
+              <a:rPr lang="zh-TW" altLang="en-US"/>
               <a:t>按一下以編輯母片文字樣式</a:t>
             </a:r>
           </a:p>
           <a:p>
             <a:pPr lvl="1"/>
             <a:r>
-              <a:rPr lang="zh-TW" altLang="en-US" smtClean="0"/>
+              <a:rPr lang="zh-TW" altLang="en-US"/>
               <a:t>第二層</a:t>
             </a:r>
           </a:p>
           <a:p>
             <a:pPr lvl="2"/>
             <a:r>
-              <a:rPr lang="zh-TW" altLang="en-US" smtClean="0"/>
+              <a:rPr lang="zh-TW" altLang="en-US"/>
               <a:t>第三層</a:t>
             </a:r>
           </a:p>
           <a:p>
             <a:pPr lvl="3"/>
             <a:r>
-              <a:rPr lang="zh-TW" altLang="en-US" smtClean="0"/>
+              <a:rPr lang="zh-TW" altLang="en-US"/>
               <a:t>第四層</a:t>
             </a:r>
           </a:p>
           <a:p>
             <a:pPr lvl="4"/>
             <a:r>
-              <a:rPr lang="zh-TW" altLang="en-US" smtClean="0"/>
+              <a:rPr lang="zh-TW" altLang="en-US"/>
               <a:t>第五層</a:t>
             </a:r>
-            <a:endParaRPr lang="zh-TW" altLang="en-US"/>
           </a:p>
         </p:txBody>
       </p:sp>
@@ -638,7 +653,7 @@
             <a:fld id="{0E81C37E-70E7-48DF-B3C5-187CCDBE83A5}" type="datetimeFigureOut">
               <a:rPr lang="zh-TW" altLang="en-US" smtClean="0"/>
               <a:pPr/>
-              <a:t>2017/12/23</a:t>
+              <a:t>2024/4/25</a:t>
             </a:fld>
             <a:endParaRPr lang="zh-TW" altLang="en-US"/>
           </a:p>
@@ -728,10 +743,9 @@
           <a:lstStyle/>
           <a:p>
             <a:r>
-              <a:rPr lang="zh-TW" altLang="en-US" smtClean="0"/>
+              <a:rPr lang="zh-TW" altLang="en-US"/>
               <a:t>按一下以編輯母片標題樣式</a:t>
             </a:r>
-            <a:endParaRPr lang="zh-TW" altLang="en-US"/>
           </a:p>
         </p:txBody>
       </p:sp>
@@ -752,38 +766,37 @@
           <a:p>
             <a:pPr lvl="0"/>
             <a:r>
-              <a:rPr lang="zh-TW" altLang="en-US" smtClean="0"/>
+              <a:rPr lang="zh-TW" altLang="en-US"/>
               <a:t>按一下以編輯母片文字樣式</a:t>
             </a:r>
           </a:p>
           <a:p>
             <a:pPr lvl="1"/>
             <a:r>
-              <a:rPr lang="zh-TW" altLang="en-US" smtClean="0"/>
+              <a:rPr lang="zh-TW" altLang="en-US"/>
               <a:t>第二層</a:t>
             </a:r>
           </a:p>
           <a:p>
             <a:pPr lvl="2"/>
             <a:r>
-              <a:rPr lang="zh-TW" altLang="en-US" smtClean="0"/>
+              <a:rPr lang="zh-TW" altLang="en-US"/>
               <a:t>第三層</a:t>
             </a:r>
           </a:p>
           <a:p>
             <a:pPr lvl="3"/>
             <a:r>
-              <a:rPr lang="zh-TW" altLang="en-US" smtClean="0"/>
+              <a:rPr lang="zh-TW" altLang="en-US"/>
               <a:t>第四層</a:t>
             </a:r>
           </a:p>
           <a:p>
             <a:pPr lvl="4"/>
             <a:r>
-              <a:rPr lang="zh-TW" altLang="en-US" smtClean="0"/>
+              <a:rPr lang="zh-TW" altLang="en-US"/>
               <a:t>第五層</a:t>
             </a:r>
-            <a:endParaRPr lang="zh-TW" altLang="en-US"/>
           </a:p>
         </p:txBody>
       </p:sp>
@@ -805,7 +818,7 @@
             <a:fld id="{0E81C37E-70E7-48DF-B3C5-187CCDBE83A5}" type="datetimeFigureOut">
               <a:rPr lang="zh-TW" altLang="en-US" smtClean="0"/>
               <a:pPr/>
-              <a:t>2017/12/23</a:t>
+              <a:t>2024/4/25</a:t>
             </a:fld>
             <a:endParaRPr lang="zh-TW" altLang="en-US"/>
           </a:p>
@@ -891,8 +904,8 @@
         </p:nvSpPr>
         <p:spPr>
           <a:xfrm>
-            <a:off x="722313" y="4406900"/>
-            <a:ext cx="7772400" cy="1362075"/>
+            <a:off x="963084" y="4406901"/>
+            <a:ext cx="10363200" cy="1362075"/>
           </a:xfrm>
         </p:spPr>
         <p:txBody>
@@ -904,10 +917,9 @@
           </a:lstStyle>
           <a:p>
             <a:r>
-              <a:rPr lang="zh-TW" altLang="en-US" smtClean="0"/>
+              <a:rPr lang="zh-TW" altLang="en-US"/>
               <a:t>按一下以編輯母片標題樣式</a:t>
             </a:r>
-            <a:endParaRPr lang="zh-TW" altLang="en-US"/>
           </a:p>
         </p:txBody>
       </p:sp>
@@ -923,8 +935,8 @@
         </p:nvSpPr>
         <p:spPr>
           <a:xfrm>
-            <a:off x="722313" y="2906713"/>
-            <a:ext cx="7772400" cy="1500187"/>
+            <a:off x="963084" y="2906713"/>
+            <a:ext cx="10363200" cy="1500187"/>
           </a:xfrm>
         </p:spPr>
         <p:txBody>
@@ -1024,7 +1036,7 @@
           <a:p>
             <a:pPr lvl="0"/>
             <a:r>
-              <a:rPr lang="zh-TW" altLang="en-US" smtClean="0"/>
+              <a:rPr lang="zh-TW" altLang="en-US"/>
               <a:t>按一下以編輯母片文字樣式</a:t>
             </a:r>
           </a:p>
@@ -1048,7 +1060,7 @@
             <a:fld id="{0E81C37E-70E7-48DF-B3C5-187CCDBE83A5}" type="datetimeFigureOut">
               <a:rPr lang="zh-TW" altLang="en-US" smtClean="0"/>
               <a:pPr/>
-              <a:t>2017/12/23</a:t>
+              <a:t>2024/4/25</a:t>
             </a:fld>
             <a:endParaRPr lang="zh-TW" altLang="en-US"/>
           </a:p>
@@ -1138,10 +1150,9 @@
           <a:lstStyle/>
           <a:p>
             <a:r>
-              <a:rPr lang="zh-TW" altLang="en-US" smtClean="0"/>
+              <a:rPr lang="zh-TW" altLang="en-US"/>
               <a:t>按一下以編輯母片標題樣式</a:t>
             </a:r>
-            <a:endParaRPr lang="zh-TW" altLang="en-US"/>
           </a:p>
         </p:txBody>
       </p:sp>
@@ -1157,8 +1168,8 @@
         </p:nvSpPr>
         <p:spPr>
           <a:xfrm>
-            <a:off x="457200" y="1600200"/>
-            <a:ext cx="4038600" cy="4525963"/>
+            <a:off x="609600" y="1600201"/>
+            <a:ext cx="5384800" cy="4525963"/>
           </a:xfrm>
         </p:spPr>
         <p:txBody>
@@ -1195,38 +1206,37 @@
           <a:p>
             <a:pPr lvl="0"/>
             <a:r>
-              <a:rPr lang="zh-TW" altLang="en-US" smtClean="0"/>
+              <a:rPr lang="zh-TW" altLang="en-US"/>
               <a:t>按一下以編輯母片文字樣式</a:t>
             </a:r>
           </a:p>
           <a:p>
             <a:pPr lvl="1"/>
             <a:r>
-              <a:rPr lang="zh-TW" altLang="en-US" smtClean="0"/>
+              <a:rPr lang="zh-TW" altLang="en-US"/>
               <a:t>第二層</a:t>
             </a:r>
           </a:p>
           <a:p>
             <a:pPr lvl="2"/>
             <a:r>
-              <a:rPr lang="zh-TW" altLang="en-US" smtClean="0"/>
+              <a:rPr lang="zh-TW" altLang="en-US"/>
               <a:t>第三層</a:t>
             </a:r>
           </a:p>
           <a:p>
             <a:pPr lvl="3"/>
             <a:r>
-              <a:rPr lang="zh-TW" altLang="en-US" smtClean="0"/>
+              <a:rPr lang="zh-TW" altLang="en-US"/>
               <a:t>第四層</a:t>
             </a:r>
           </a:p>
           <a:p>
             <a:pPr lvl="4"/>
             <a:r>
-              <a:rPr lang="zh-TW" altLang="en-US" smtClean="0"/>
+              <a:rPr lang="zh-TW" altLang="en-US"/>
               <a:t>第五層</a:t>
             </a:r>
-            <a:endParaRPr lang="zh-TW" altLang="en-US"/>
           </a:p>
         </p:txBody>
       </p:sp>
@@ -1242,8 +1252,8 @@
         </p:nvSpPr>
         <p:spPr>
           <a:xfrm>
-            <a:off x="4648200" y="1600200"/>
-            <a:ext cx="4038600" cy="4525963"/>
+            <a:off x="6197600" y="1600201"/>
+            <a:ext cx="5384800" cy="4525963"/>
           </a:xfrm>
         </p:spPr>
         <p:txBody>
@@ -1280,38 +1290,37 @@
           <a:p>
             <a:pPr lvl="0"/>
             <a:r>
-              <a:rPr lang="zh-TW" altLang="en-US" smtClean="0"/>
+              <a:rPr lang="zh-TW" altLang="en-US"/>
               <a:t>按一下以編輯母片文字樣式</a:t>
             </a:r>
           </a:p>
           <a:p>
             <a:pPr lvl="1"/>
             <a:r>
-              <a:rPr lang="zh-TW" altLang="en-US" smtClean="0"/>
+              <a:rPr lang="zh-TW" altLang="en-US"/>
               <a:t>第二層</a:t>
             </a:r>
           </a:p>
           <a:p>
             <a:pPr lvl="2"/>
             <a:r>
-              <a:rPr lang="zh-TW" altLang="en-US" smtClean="0"/>
+              <a:rPr lang="zh-TW" altLang="en-US"/>
               <a:t>第三層</a:t>
             </a:r>
           </a:p>
           <a:p>
             <a:pPr lvl="3"/>
             <a:r>
-              <a:rPr lang="zh-TW" altLang="en-US" smtClean="0"/>
+              <a:rPr lang="zh-TW" altLang="en-US"/>
               <a:t>第四層</a:t>
             </a:r>
           </a:p>
           <a:p>
             <a:pPr lvl="4"/>
             <a:r>
-              <a:rPr lang="zh-TW" altLang="en-US" smtClean="0"/>
+              <a:rPr lang="zh-TW" altLang="en-US"/>
               <a:t>第五層</a:t>
             </a:r>
-            <a:endParaRPr lang="zh-TW" altLang="en-US"/>
           </a:p>
         </p:txBody>
       </p:sp>
@@ -1333,7 +1342,7 @@
             <a:fld id="{0E81C37E-70E7-48DF-B3C5-187CCDBE83A5}" type="datetimeFigureOut">
               <a:rPr lang="zh-TW" altLang="en-US" smtClean="0"/>
               <a:pPr/>
-              <a:t>2017/12/23</a:t>
+              <a:t>2024/4/25</a:t>
             </a:fld>
             <a:endParaRPr lang="zh-TW" altLang="en-US"/>
           </a:p>
@@ -1427,10 +1436,9 @@
           </a:lstStyle>
           <a:p>
             <a:r>
-              <a:rPr lang="zh-TW" altLang="en-US" smtClean="0"/>
+              <a:rPr lang="zh-TW" altLang="en-US"/>
               <a:t>按一下以編輯母片標題樣式</a:t>
             </a:r>
-            <a:endParaRPr lang="zh-TW" altLang="en-US"/>
           </a:p>
         </p:txBody>
       </p:sp>
@@ -1446,8 +1454,8 @@
         </p:nvSpPr>
         <p:spPr>
           <a:xfrm>
-            <a:off x="457200" y="1535113"/>
-            <a:ext cx="4040188" cy="639762"/>
+            <a:off x="609600" y="1535113"/>
+            <a:ext cx="5386917" cy="639762"/>
           </a:xfrm>
         </p:spPr>
         <p:txBody>
@@ -1493,7 +1501,7 @@
           <a:p>
             <a:pPr lvl="0"/>
             <a:r>
-              <a:rPr lang="zh-TW" altLang="en-US" smtClean="0"/>
+              <a:rPr lang="zh-TW" altLang="en-US"/>
               <a:t>按一下以編輯母片文字樣式</a:t>
             </a:r>
           </a:p>
@@ -1511,8 +1519,8 @@
         </p:nvSpPr>
         <p:spPr>
           <a:xfrm>
-            <a:off x="457200" y="2174875"/>
-            <a:ext cx="4040188" cy="3951288"/>
+            <a:off x="609600" y="2174875"/>
+            <a:ext cx="5386917" cy="3951288"/>
           </a:xfrm>
         </p:spPr>
         <p:txBody>
@@ -1549,38 +1557,37 @@
           <a:p>
             <a:pPr lvl="0"/>
             <a:r>
-              <a:rPr lang="zh-TW" altLang="en-US" smtClean="0"/>
+              <a:rPr lang="zh-TW" altLang="en-US"/>
               <a:t>按一下以編輯母片文字樣式</a:t>
             </a:r>
           </a:p>
           <a:p>
             <a:pPr lvl="1"/>
             <a:r>
-              <a:rPr lang="zh-TW" altLang="en-US" smtClean="0"/>
+              <a:rPr lang="zh-TW" altLang="en-US"/>
               <a:t>第二層</a:t>
             </a:r>
           </a:p>
           <a:p>
             <a:pPr lvl="2"/>
             <a:r>
-              <a:rPr lang="zh-TW" altLang="en-US" smtClean="0"/>
+              <a:rPr lang="zh-TW" altLang="en-US"/>
               <a:t>第三層</a:t>
             </a:r>
           </a:p>
           <a:p>
             <a:pPr lvl="3"/>
             <a:r>
-              <a:rPr lang="zh-TW" altLang="en-US" smtClean="0"/>
+              <a:rPr lang="zh-TW" altLang="en-US"/>
               <a:t>第四層</a:t>
             </a:r>
           </a:p>
           <a:p>
             <a:pPr lvl="4"/>
             <a:r>
-              <a:rPr lang="zh-TW" altLang="en-US" smtClean="0"/>
+              <a:rPr lang="zh-TW" altLang="en-US"/>
               <a:t>第五層</a:t>
             </a:r>
-            <a:endParaRPr lang="zh-TW" altLang="en-US"/>
           </a:p>
         </p:txBody>
       </p:sp>
@@ -1596,8 +1603,8 @@
         </p:nvSpPr>
         <p:spPr>
           <a:xfrm>
-            <a:off x="4645025" y="1535113"/>
-            <a:ext cx="4041775" cy="639762"/>
+            <a:off x="6193368" y="1535113"/>
+            <a:ext cx="5389033" cy="639762"/>
           </a:xfrm>
         </p:spPr>
         <p:txBody>
@@ -1643,7 +1650,7 @@
           <a:p>
             <a:pPr lvl="0"/>
             <a:r>
-              <a:rPr lang="zh-TW" altLang="en-US" smtClean="0"/>
+              <a:rPr lang="zh-TW" altLang="en-US"/>
               <a:t>按一下以編輯母片文字樣式</a:t>
             </a:r>
           </a:p>
@@ -1661,8 +1668,8 @@
         </p:nvSpPr>
         <p:spPr>
           <a:xfrm>
-            <a:off x="4645025" y="2174875"/>
-            <a:ext cx="4041775" cy="3951288"/>
+            <a:off x="6193368" y="2174875"/>
+            <a:ext cx="5389033" cy="3951288"/>
           </a:xfrm>
         </p:spPr>
         <p:txBody>
@@ -1699,38 +1706,37 @@
           <a:p>
             <a:pPr lvl="0"/>
             <a:r>
-              <a:rPr lang="zh-TW" altLang="en-US" smtClean="0"/>
+              <a:rPr lang="zh-TW" altLang="en-US"/>
               <a:t>按一下以編輯母片文字樣式</a:t>
             </a:r>
           </a:p>
           <a:p>
             <a:pPr lvl="1"/>
             <a:r>
-              <a:rPr lang="zh-TW" altLang="en-US" smtClean="0"/>
+              <a:rPr lang="zh-TW" altLang="en-US"/>
               <a:t>第二層</a:t>
             </a:r>
           </a:p>
           <a:p>
             <a:pPr lvl="2"/>
             <a:r>
-              <a:rPr lang="zh-TW" altLang="en-US" smtClean="0"/>
+              <a:rPr lang="zh-TW" altLang="en-US"/>
               <a:t>第三層</a:t>
             </a:r>
           </a:p>
           <a:p>
             <a:pPr lvl="3"/>
             <a:r>
-              <a:rPr lang="zh-TW" altLang="en-US" smtClean="0"/>
+              <a:rPr lang="zh-TW" altLang="en-US"/>
               <a:t>第四層</a:t>
             </a:r>
           </a:p>
           <a:p>
             <a:pPr lvl="4"/>
             <a:r>
-              <a:rPr lang="zh-TW" altLang="en-US" smtClean="0"/>
+              <a:rPr lang="zh-TW" altLang="en-US"/>
               <a:t>第五層</a:t>
             </a:r>
-            <a:endParaRPr lang="zh-TW" altLang="en-US"/>
           </a:p>
         </p:txBody>
       </p:sp>
@@ -1752,7 +1758,7 @@
             <a:fld id="{0E81C37E-70E7-48DF-B3C5-187CCDBE83A5}" type="datetimeFigureOut">
               <a:rPr lang="zh-TW" altLang="en-US" smtClean="0"/>
               <a:pPr/>
-              <a:t>2017/12/23</a:t>
+              <a:t>2024/4/25</a:t>
             </a:fld>
             <a:endParaRPr lang="zh-TW" altLang="en-US"/>
           </a:p>
@@ -1842,10 +1848,9 @@
           <a:lstStyle/>
           <a:p>
             <a:r>
-              <a:rPr lang="zh-TW" altLang="en-US" smtClean="0"/>
+              <a:rPr lang="zh-TW" altLang="en-US"/>
               <a:t>按一下以編輯母片標題樣式</a:t>
             </a:r>
-            <a:endParaRPr lang="zh-TW" altLang="en-US"/>
           </a:p>
         </p:txBody>
       </p:sp>
@@ -1867,7 +1872,7 @@
             <a:fld id="{0E81C37E-70E7-48DF-B3C5-187CCDBE83A5}" type="datetimeFigureOut">
               <a:rPr lang="zh-TW" altLang="en-US" smtClean="0"/>
               <a:pPr/>
-              <a:t>2017/12/23</a:t>
+              <a:t>2024/4/25</a:t>
             </a:fld>
             <a:endParaRPr lang="zh-TW" altLang="en-US"/>
           </a:p>
@@ -1959,7 +1964,7 @@
             <a:fld id="{0E81C37E-70E7-48DF-B3C5-187CCDBE83A5}" type="datetimeFigureOut">
               <a:rPr lang="zh-TW" altLang="en-US" smtClean="0"/>
               <a:pPr/>
-              <a:t>2017/12/23</a:t>
+              <a:t>2024/4/25</a:t>
             </a:fld>
             <a:endParaRPr lang="zh-TW" altLang="en-US"/>
           </a:p>
@@ -2045,8 +2050,8 @@
         </p:nvSpPr>
         <p:spPr>
           <a:xfrm>
-            <a:off x="457200" y="273050"/>
-            <a:ext cx="3008313" cy="1162050"/>
+            <a:off x="609601" y="273050"/>
+            <a:ext cx="4011084" cy="1162050"/>
           </a:xfrm>
         </p:spPr>
         <p:txBody>
@@ -2058,10 +2063,9 @@
           </a:lstStyle>
           <a:p>
             <a:r>
-              <a:rPr lang="zh-TW" altLang="en-US" smtClean="0"/>
+              <a:rPr lang="zh-TW" altLang="en-US"/>
               <a:t>按一下以編輯母片標題樣式</a:t>
             </a:r>
-            <a:endParaRPr lang="zh-TW" altLang="en-US"/>
           </a:p>
         </p:txBody>
       </p:sp>
@@ -2077,8 +2081,8 @@
         </p:nvSpPr>
         <p:spPr>
           <a:xfrm>
-            <a:off x="3575050" y="273050"/>
-            <a:ext cx="5111750" cy="5853113"/>
+            <a:off x="4766733" y="273051"/>
+            <a:ext cx="6815667" cy="5853113"/>
           </a:xfrm>
         </p:spPr>
         <p:txBody>
@@ -2115,38 +2119,37 @@
           <a:p>
             <a:pPr lvl="0"/>
             <a:r>
-              <a:rPr lang="zh-TW" altLang="en-US" smtClean="0"/>
+              <a:rPr lang="zh-TW" altLang="en-US"/>
               <a:t>按一下以編輯母片文字樣式</a:t>
             </a:r>
           </a:p>
           <a:p>
             <a:pPr lvl="1"/>
             <a:r>
-              <a:rPr lang="zh-TW" altLang="en-US" smtClean="0"/>
+              <a:rPr lang="zh-TW" altLang="en-US"/>
               <a:t>第二層</a:t>
             </a:r>
           </a:p>
           <a:p>
             <a:pPr lvl="2"/>
             <a:r>
-              <a:rPr lang="zh-TW" altLang="en-US" smtClean="0"/>
+              <a:rPr lang="zh-TW" altLang="en-US"/>
               <a:t>第三層</a:t>
             </a:r>
           </a:p>
           <a:p>
             <a:pPr lvl="3"/>
             <a:r>
-              <a:rPr lang="zh-TW" altLang="en-US" smtClean="0"/>
+              <a:rPr lang="zh-TW" altLang="en-US"/>
               <a:t>第四層</a:t>
             </a:r>
           </a:p>
           <a:p>
             <a:pPr lvl="4"/>
             <a:r>
-              <a:rPr lang="zh-TW" altLang="en-US" smtClean="0"/>
+              <a:rPr lang="zh-TW" altLang="en-US"/>
               <a:t>第五層</a:t>
             </a:r>
-            <a:endParaRPr lang="zh-TW" altLang="en-US"/>
           </a:p>
         </p:txBody>
       </p:sp>
@@ -2162,8 +2165,8 @@
         </p:nvSpPr>
         <p:spPr>
           <a:xfrm>
-            <a:off x="457200" y="1435100"/>
-            <a:ext cx="3008313" cy="4691063"/>
+            <a:off x="609601" y="1435101"/>
+            <a:ext cx="4011084" cy="4691063"/>
           </a:xfrm>
         </p:spPr>
         <p:txBody>
@@ -2209,7 +2212,7 @@
           <a:p>
             <a:pPr lvl="0"/>
             <a:r>
-              <a:rPr lang="zh-TW" altLang="en-US" smtClean="0"/>
+              <a:rPr lang="zh-TW" altLang="en-US"/>
               <a:t>按一下以編輯母片文字樣式</a:t>
             </a:r>
           </a:p>
@@ -2233,7 +2236,7 @@
             <a:fld id="{0E81C37E-70E7-48DF-B3C5-187CCDBE83A5}" type="datetimeFigureOut">
               <a:rPr lang="zh-TW" altLang="en-US" smtClean="0"/>
               <a:pPr/>
-              <a:t>2017/12/23</a:t>
+              <a:t>2024/4/25</a:t>
             </a:fld>
             <a:endParaRPr lang="zh-TW" altLang="en-US"/>
           </a:p>
@@ -2319,8 +2322,8 @@
         </p:nvSpPr>
         <p:spPr>
           <a:xfrm>
-            <a:off x="1792288" y="4800600"/>
-            <a:ext cx="5486400" cy="566738"/>
+            <a:off x="2389717" y="4800600"/>
+            <a:ext cx="7315200" cy="566738"/>
           </a:xfrm>
         </p:spPr>
         <p:txBody>
@@ -2332,10 +2335,9 @@
           </a:lstStyle>
           <a:p>
             <a:r>
-              <a:rPr lang="zh-TW" altLang="en-US" smtClean="0"/>
+              <a:rPr lang="zh-TW" altLang="en-US"/>
               <a:t>按一下以編輯母片標題樣式</a:t>
             </a:r>
-            <a:endParaRPr lang="zh-TW" altLang="en-US"/>
           </a:p>
         </p:txBody>
       </p:sp>
@@ -2351,8 +2353,8 @@
         </p:nvSpPr>
         <p:spPr>
           <a:xfrm>
-            <a:off x="1792288" y="612775"/>
-            <a:ext cx="5486400" cy="4114800"/>
+            <a:off x="2389717" y="612775"/>
+            <a:ext cx="7315200" cy="4114800"/>
           </a:xfrm>
         </p:spPr>
         <p:txBody>
@@ -2397,10 +2399,9 @@
           </a:lstStyle>
           <a:p>
             <a:r>
-              <a:rPr lang="zh-TW" altLang="en-US" smtClean="0"/>
+              <a:rPr lang="zh-TW" altLang="en-US"/>
               <a:t>按一下圖示以新增圖片</a:t>
             </a:r>
-            <a:endParaRPr lang="zh-TW" altLang="en-US"/>
           </a:p>
         </p:txBody>
       </p:sp>
@@ -2416,8 +2417,8 @@
         </p:nvSpPr>
         <p:spPr>
           <a:xfrm>
-            <a:off x="1792288" y="5367338"/>
-            <a:ext cx="5486400" cy="804862"/>
+            <a:off x="2389717" y="5367338"/>
+            <a:ext cx="7315200" cy="804862"/>
           </a:xfrm>
         </p:spPr>
         <p:txBody>
@@ -2463,7 +2464,7 @@
           <a:p>
             <a:pPr lvl="0"/>
             <a:r>
-              <a:rPr lang="zh-TW" altLang="en-US" smtClean="0"/>
+              <a:rPr lang="zh-TW" altLang="en-US"/>
               <a:t>按一下以編輯母片文字樣式</a:t>
             </a:r>
           </a:p>
@@ -2487,7 +2488,7 @@
             <a:fld id="{0E81C37E-70E7-48DF-B3C5-187CCDBE83A5}" type="datetimeFigureOut">
               <a:rPr lang="zh-TW" altLang="en-US" smtClean="0"/>
               <a:pPr/>
-              <a:t>2017/12/23</a:t>
+              <a:t>2024/4/25</a:t>
             </a:fld>
             <a:endParaRPr lang="zh-TW" altLang="en-US"/>
           </a:p>
@@ -2583,8 +2584,8 @@
         </p:nvSpPr>
         <p:spPr>
           <a:xfrm>
-            <a:off x="457200" y="274638"/>
-            <a:ext cx="8229600" cy="1143000"/>
+            <a:off x="609600" y="274638"/>
+            <a:ext cx="10972800" cy="1143000"/>
           </a:xfrm>
           <a:prstGeom prst="rect">
             <a:avLst/>
@@ -2597,10 +2598,9 @@
           <a:lstStyle/>
           <a:p>
             <a:r>
-              <a:rPr lang="zh-TW" altLang="en-US" smtClean="0"/>
+              <a:rPr lang="zh-TW" altLang="en-US"/>
               <a:t>按一下以編輯母片標題樣式</a:t>
             </a:r>
-            <a:endParaRPr lang="zh-TW" altLang="en-US"/>
           </a:p>
         </p:txBody>
       </p:sp>
@@ -2616,8 +2616,8 @@
         </p:nvSpPr>
         <p:spPr>
           <a:xfrm>
-            <a:off x="457200" y="1600200"/>
-            <a:ext cx="8229600" cy="4525963"/>
+            <a:off x="609600" y="1600201"/>
+            <a:ext cx="10972800" cy="4525963"/>
           </a:xfrm>
           <a:prstGeom prst="rect">
             <a:avLst/>
@@ -2631,38 +2631,37 @@
           <a:p>
             <a:pPr lvl="0"/>
             <a:r>
-              <a:rPr lang="zh-TW" altLang="en-US" smtClean="0"/>
+              <a:rPr lang="zh-TW" altLang="en-US"/>
               <a:t>按一下以編輯母片文字樣式</a:t>
             </a:r>
           </a:p>
           <a:p>
             <a:pPr lvl="1"/>
             <a:r>
-              <a:rPr lang="zh-TW" altLang="en-US" smtClean="0"/>
+              <a:rPr lang="zh-TW" altLang="en-US"/>
               <a:t>第二層</a:t>
             </a:r>
           </a:p>
           <a:p>
             <a:pPr lvl="2"/>
             <a:r>
-              <a:rPr lang="zh-TW" altLang="en-US" smtClean="0"/>
+              <a:rPr lang="zh-TW" altLang="en-US"/>
               <a:t>第三層</a:t>
             </a:r>
           </a:p>
           <a:p>
             <a:pPr lvl="3"/>
             <a:r>
-              <a:rPr lang="zh-TW" altLang="en-US" smtClean="0"/>
+              <a:rPr lang="zh-TW" altLang="en-US"/>
               <a:t>第四層</a:t>
             </a:r>
           </a:p>
           <a:p>
             <a:pPr lvl="4"/>
             <a:r>
-              <a:rPr lang="zh-TW" altLang="en-US" smtClean="0"/>
+              <a:rPr lang="zh-TW" altLang="en-US"/>
               <a:t>第五層</a:t>
             </a:r>
-            <a:endParaRPr lang="zh-TW" altLang="en-US"/>
           </a:p>
         </p:txBody>
       </p:sp>
@@ -2678,8 +2677,8 @@
         </p:nvSpPr>
         <p:spPr>
           <a:xfrm>
-            <a:off x="457200" y="6356350"/>
-            <a:ext cx="2133600" cy="365125"/>
+            <a:off x="609600" y="6356351"/>
+            <a:ext cx="2844800" cy="365125"/>
           </a:xfrm>
           <a:prstGeom prst="rect">
             <a:avLst/>
@@ -2702,7 +2701,7 @@
             <a:fld id="{0E81C37E-70E7-48DF-B3C5-187CCDBE83A5}" type="datetimeFigureOut">
               <a:rPr lang="zh-TW" altLang="en-US" smtClean="0"/>
               <a:pPr/>
-              <a:t>2017/12/23</a:t>
+              <a:t>2024/4/25</a:t>
             </a:fld>
             <a:endParaRPr lang="zh-TW" altLang="en-US"/>
           </a:p>
@@ -2720,8 +2719,8 @@
         </p:nvSpPr>
         <p:spPr>
           <a:xfrm>
-            <a:off x="3124200" y="6356350"/>
-            <a:ext cx="2895600" cy="365125"/>
+            <a:off x="4165600" y="6356351"/>
+            <a:ext cx="3860800" cy="365125"/>
           </a:xfrm>
           <a:prstGeom prst="rect">
             <a:avLst/>
@@ -2757,8 +2756,8 @@
         </p:nvSpPr>
         <p:spPr>
           <a:xfrm>
-            <a:off x="6553200" y="6356350"/>
-            <a:ext cx="2133600" cy="365125"/>
+            <a:off x="8737600" y="6356351"/>
+            <a:ext cx="2844800" cy="365125"/>
           </a:xfrm>
           <a:prstGeom prst="rect">
             <a:avLst/>
@@ -3083,22 +3082,104 @@
             <p:ph type="title"/>
           </p:nvPr>
         </p:nvSpPr>
-        <p:spPr/>
-        <p:txBody>
-          <a:bodyPr/>
-          <a:lstStyle/>
-          <a:p>
-            <a:r>
-              <a:rPr lang="zh-TW" altLang="en-US" b="1" dirty="0" smtClean="0">
-                <a:solidFill>
-                  <a:srgbClr val="660033"/>
-                </a:solidFill>
+        <p:spPr>
+          <a:xfrm>
+            <a:off x="0" y="2660915"/>
+            <a:ext cx="12192000" cy="1143000"/>
+          </a:xfrm>
+        </p:spPr>
+        <p:txBody>
+          <a:bodyPr>
+            <a:noAutofit/>
+          </a:bodyPr>
+          <a:lstStyle/>
+          <a:p>
+            <a:r>
+              <a:rPr lang="zh-TW" altLang="en-US" sz="7200" b="1" i="1" dirty="0">
+                <a:solidFill>
+                  <a:srgbClr val="660033"/>
+                </a:solidFill>
+                <a:effectLst>
+                  <a:outerShdw blurRad="38100" dist="38100" dir="2700000" algn="tl">
+                    <a:srgbClr val="000000">
+                      <a:alpha val="43137"/>
+                    </a:srgbClr>
+                  </a:outerShdw>
+                </a:effectLst>
                 <a:latin typeface="微軟正黑體" pitchFamily="34" charset="-120"/>
                 <a:ea typeface="微軟正黑體" pitchFamily="34" charset="-120"/>
               </a:rPr>
               <a:t>腳步</a:t>
             </a:r>
-            <a:endParaRPr lang="zh-TW" altLang="en-US" b="1" dirty="0">
+          </a:p>
+        </p:txBody>
+      </p:sp>
+    </p:spTree>
+    <p:extLst>
+      <p:ext uri="{BB962C8B-B14F-4D97-AF65-F5344CB8AC3E}">
+        <p14:creationId xmlns:p14="http://schemas.microsoft.com/office/powerpoint/2010/main" val="68586823"/>
+      </p:ext>
+    </p:extLst>
+  </p:cSld>
+  <p:clrMapOvr>
+    <a:masterClrMapping/>
+  </p:clrMapOvr>
+</p:sld>
+</file>
+
+<file path=ppt/slides/slide10.xml><?xml version="1.0" encoding="utf-8"?>
+<p:sld xmlns:a="http://schemas.openxmlformats.org/drawingml/2006/main" xmlns:r="http://schemas.openxmlformats.org/officeDocument/2006/relationships" xmlns:p="http://schemas.openxmlformats.org/presentationml/2006/main">
+  <p:cSld>
+    <p:spTree>
+      <p:nvGrpSpPr>
+        <p:cNvPr id="1" name=""/>
+        <p:cNvGrpSpPr/>
+        <p:nvPr/>
+      </p:nvGrpSpPr>
+      <p:grpSpPr>
+        <a:xfrm>
+          <a:off x="0" y="0"/>
+          <a:ext cx="0" cy="0"/>
+          <a:chOff x="0" y="0"/>
+          <a:chExt cx="0" cy="0"/>
+        </a:xfrm>
+      </p:grpSpPr>
+      <p:sp>
+        <p:nvSpPr>
+          <p:cNvPr id="5" name="內容版面配置區 4"/>
+          <p:cNvSpPr>
+            <a:spLocks noGrp="1"/>
+          </p:cNvSpPr>
+          <p:nvPr>
+            <p:ph idx="1"/>
+          </p:nvPr>
+        </p:nvSpPr>
+        <p:spPr>
+          <a:xfrm>
+            <a:off x="0" y="2084853"/>
+            <a:ext cx="12192000" cy="2404863"/>
+          </a:xfrm>
+        </p:spPr>
+        <p:txBody>
+          <a:bodyPr anchor="ctr">
+            <a:normAutofit/>
+          </a:bodyPr>
+          <a:lstStyle/>
+          <a:p>
+            <a:pPr algn="ctr">
+              <a:buNone/>
+            </a:pPr>
+            <a:r>
+              <a:rPr lang="zh-TW" altLang="en-US" sz="6600" b="1" dirty="0">
+                <a:solidFill>
+                  <a:srgbClr val="660033"/>
+                </a:solidFill>
+                <a:latin typeface="微軟正黑體" pitchFamily="34" charset="-120"/>
+                <a:ea typeface="微軟正黑體" pitchFamily="34" charset="-120"/>
+              </a:rPr>
+              <a:t>就算經過黑暗谷</a:t>
+            </a:r>
+            <a:endParaRPr lang="en-US" altLang="zh-TW" sz="6600" b="1" dirty="0">
               <a:solidFill>
                 <a:srgbClr val="660033"/>
               </a:solidFill>
@@ -3106,74 +3187,21 @@
               <a:ea typeface="微軟正黑體" pitchFamily="34" charset="-120"/>
             </a:endParaRPr>
           </a:p>
-        </p:txBody>
-      </p:sp>
-      <p:sp>
-        <p:nvSpPr>
-          <p:cNvPr id="5" name="內容版面配置區 4"/>
-          <p:cNvSpPr>
-            <a:spLocks noGrp="1"/>
-          </p:cNvSpPr>
-          <p:nvPr>
-            <p:ph idx="1"/>
-          </p:nvPr>
-        </p:nvSpPr>
-        <p:spPr>
-          <a:xfrm>
-            <a:off x="0" y="1807361"/>
-            <a:ext cx="9144000" cy="4051437"/>
-          </a:xfrm>
-        </p:spPr>
-        <p:txBody>
-          <a:bodyPr>
-            <a:noAutofit/>
-          </a:bodyPr>
-          <a:lstStyle/>
           <a:p>
             <a:pPr algn="ctr">
               <a:buNone/>
             </a:pPr>
             <a:r>
-              <a:rPr lang="zh-TW" altLang="en-US" sz="5400" b="1" dirty="0">
+              <a:rPr lang="zh-TW" altLang="en-US" sz="6600" b="1" dirty="0">
                 <a:solidFill>
                   <a:srgbClr val="660033"/>
                 </a:solidFill>
                 <a:latin typeface="微軟正黑體" pitchFamily="34" charset="-120"/>
                 <a:ea typeface="微軟正黑體" pitchFamily="34" charset="-120"/>
               </a:rPr>
-              <a:t>你的</a:t>
-            </a:r>
-            <a:r>
-              <a:rPr lang="zh-TW" altLang="en-US" sz="5400" b="1" dirty="0" smtClean="0">
-                <a:solidFill>
-                  <a:srgbClr val="660033"/>
-                </a:solidFill>
-                <a:latin typeface="微軟正黑體" pitchFamily="34" charset="-120"/>
-                <a:ea typeface="微軟正黑體" pitchFamily="34" charset="-120"/>
-              </a:rPr>
-              <a:t>腳步 帶</a:t>
-            </a:r>
-            <a:r>
-              <a:rPr lang="zh-TW" altLang="en-US" sz="5400" b="1" dirty="0">
-                <a:solidFill>
-                  <a:srgbClr val="660033"/>
-                </a:solidFill>
-                <a:latin typeface="微軟正黑體" pitchFamily="34" charset="-120"/>
-                <a:ea typeface="微軟正黑體" pitchFamily="34" charset="-120"/>
-              </a:rPr>
-              <a:t>著我的</a:t>
-            </a:r>
-            <a:r>
-              <a:rPr lang="zh-TW" altLang="en-US" sz="5400" b="1" dirty="0" smtClean="0">
-                <a:solidFill>
-                  <a:srgbClr val="660033"/>
-                </a:solidFill>
-                <a:latin typeface="微軟正黑體" pitchFamily="34" charset="-120"/>
-                <a:ea typeface="微軟正黑體" pitchFamily="34" charset="-120"/>
-              </a:rPr>
-              <a:t>腳步</a:t>
-            </a:r>
-            <a:endParaRPr lang="en-US" altLang="zh-TW" sz="5400" b="1" dirty="0" smtClean="0">
+              <a:t>就算遇到暴風雨</a:t>
+            </a:r>
+            <a:endParaRPr lang="en-US" altLang="zh-TW" sz="6600" b="1" dirty="0">
               <a:solidFill>
                 <a:srgbClr val="660033"/>
               </a:solidFill>
@@ -3181,138 +3209,206 @@
               <a:ea typeface="微軟正黑體" pitchFamily="34" charset="-120"/>
             </a:endParaRPr>
           </a:p>
-          <a:p>
-            <a:pPr algn="ctr">
-              <a:buNone/>
-            </a:pPr>
-            <a:r>
-              <a:rPr lang="zh-TW" altLang="en-US" sz="5400" b="1" dirty="0" smtClean="0">
-                <a:solidFill>
-                  <a:srgbClr val="660033"/>
-                </a:solidFill>
-                <a:latin typeface="微軟正黑體" pitchFamily="34" charset="-120"/>
-                <a:ea typeface="微軟正黑體" pitchFamily="34" charset="-120"/>
-              </a:rPr>
-              <a:t>一步一步 都</a:t>
-            </a:r>
-            <a:r>
-              <a:rPr lang="zh-TW" altLang="en-US" sz="5400" b="1" dirty="0">
-                <a:solidFill>
-                  <a:srgbClr val="660033"/>
-                </a:solidFill>
-                <a:latin typeface="微軟正黑體" pitchFamily="34" charset="-120"/>
-                <a:ea typeface="微軟正黑體" pitchFamily="34" charset="-120"/>
-              </a:rPr>
-              <a:t>有</a:t>
-            </a:r>
-            <a:r>
-              <a:rPr lang="zh-TW" altLang="en-US" sz="5400" b="1" dirty="0" smtClean="0">
-                <a:solidFill>
-                  <a:srgbClr val="660033"/>
-                </a:solidFill>
-                <a:latin typeface="微軟正黑體" pitchFamily="34" charset="-120"/>
-                <a:ea typeface="微軟正黑體" pitchFamily="34" charset="-120"/>
-              </a:rPr>
-              <a:t>祝福</a:t>
-            </a:r>
-            <a:endParaRPr lang="en-US" altLang="zh-TW" sz="5400" b="1" dirty="0">
+        </p:txBody>
+      </p:sp>
+      <p:sp>
+        <p:nvSpPr>
+          <p:cNvPr id="3" name="TextBox 2"/>
+          <p:cNvSpPr txBox="1"/>
+          <p:nvPr/>
+        </p:nvSpPr>
+        <p:spPr>
+          <a:xfrm>
+            <a:off x="0" y="5157193"/>
+            <a:ext cx="12192000" cy="666786"/>
+          </a:xfrm>
+          <a:prstGeom prst="rect">
+            <a:avLst/>
+          </a:prstGeom>
+          <a:noFill/>
+        </p:spPr>
+        <p:txBody>
+          <a:bodyPr wrap="square" rtlCol="0">
+            <a:spAutoFit/>
+          </a:bodyPr>
+          <a:lstStyle/>
+          <a:p>
+            <a:pPr algn="ctr"/>
+            <a:r>
+              <a:rPr lang="en-US" sz="3600" b="1" dirty="0">
+                <a:solidFill>
+                  <a:srgbClr val="660033"/>
+                </a:solidFill>
+                <a:latin typeface="Microsoft JhengHei" panose="020B0604030504040204" pitchFamily="34" charset="-120"/>
+                <a:ea typeface="Microsoft JhengHei" panose="020B0604030504040204" pitchFamily="34" charset="-120"/>
+              </a:rPr>
+              <a:t>( </a:t>
+            </a:r>
+            <a:r>
+              <a:rPr lang="zh-CN" altLang="en-US" sz="3600" b="1" dirty="0">
+                <a:solidFill>
+                  <a:srgbClr val="660033"/>
+                </a:solidFill>
+                <a:latin typeface="Microsoft JhengHei" panose="020B0604030504040204" pitchFamily="34" charset="-120"/>
+                <a:ea typeface="Microsoft JhengHei" panose="020B0604030504040204" pitchFamily="34" charset="-120"/>
+              </a:rPr>
+              <a:t>副歌</a:t>
+            </a:r>
+            <a:r>
+              <a:rPr lang="en-US" sz="3600" b="1" dirty="0">
+                <a:solidFill>
+                  <a:srgbClr val="660033"/>
+                </a:solidFill>
+                <a:latin typeface="Microsoft JhengHei" panose="020B0604030504040204" pitchFamily="34" charset="-120"/>
+                <a:ea typeface="Microsoft JhengHei" panose="020B0604030504040204" pitchFamily="34" charset="-120"/>
+              </a:rPr>
+              <a:t> 2 )</a:t>
+            </a:r>
+            <a:endParaRPr lang="vi-VN" sz="3600" b="1" dirty="0">
               <a:solidFill>
                 <a:srgbClr val="660033"/>
               </a:solidFill>
-              <a:latin typeface="微軟正黑體" pitchFamily="34" charset="-120"/>
-              <a:ea typeface="微軟正黑體" pitchFamily="34" charset="-120"/>
+              <a:ea typeface="Microsoft JhengHei" panose="020B0604030504040204" pitchFamily="34" charset="-120"/>
             </a:endParaRPr>
           </a:p>
+        </p:txBody>
+      </p:sp>
+    </p:spTree>
+    <p:extLst>
+      <p:ext uri="{BB962C8B-B14F-4D97-AF65-F5344CB8AC3E}">
+        <p14:creationId xmlns:p14="http://schemas.microsoft.com/office/powerpoint/2010/main" val="1482552467"/>
+      </p:ext>
+    </p:extLst>
+  </p:cSld>
+  <p:clrMapOvr>
+    <a:masterClrMapping/>
+  </p:clrMapOvr>
+</p:sld>
+</file>
+
+<file path=ppt/slides/slide11.xml><?xml version="1.0" encoding="utf-8"?>
+<p:sld xmlns:a="http://schemas.openxmlformats.org/drawingml/2006/main" xmlns:r="http://schemas.openxmlformats.org/officeDocument/2006/relationships" xmlns:p="http://schemas.openxmlformats.org/presentationml/2006/main">
+  <p:cSld>
+    <p:spTree>
+      <p:nvGrpSpPr>
+        <p:cNvPr id="1" name=""/>
+        <p:cNvGrpSpPr/>
+        <p:nvPr/>
+      </p:nvGrpSpPr>
+      <p:grpSpPr>
+        <a:xfrm>
+          <a:off x="0" y="0"/>
+          <a:ext cx="0" cy="0"/>
+          <a:chOff x="0" y="0"/>
+          <a:chExt cx="0" cy="0"/>
+        </a:xfrm>
+      </p:grpSpPr>
+      <p:sp>
+        <p:nvSpPr>
+          <p:cNvPr id="5" name="內容版面配置區 4"/>
+          <p:cNvSpPr>
+            <a:spLocks noGrp="1"/>
+          </p:cNvSpPr>
+          <p:nvPr>
+            <p:ph idx="1"/>
+          </p:nvPr>
+        </p:nvSpPr>
+        <p:spPr>
+          <a:xfrm>
+            <a:off x="0" y="2084853"/>
+            <a:ext cx="12192000" cy="2404863"/>
+          </a:xfrm>
+        </p:spPr>
+        <p:txBody>
+          <a:bodyPr anchor="ctr">
+            <a:normAutofit/>
+          </a:bodyPr>
+          <a:lstStyle/>
           <a:p>
             <a:pPr algn="ctr">
               <a:buNone/>
             </a:pPr>
             <a:r>
-              <a:rPr lang="zh-TW" altLang="en-US" sz="5400" b="1" dirty="0" smtClean="0">
+              <a:rPr lang="zh-TW" altLang="en-US" sz="6600" b="1" dirty="0">
                 <a:solidFill>
                   <a:srgbClr val="660033"/>
                 </a:solidFill>
                 <a:latin typeface="微軟正黑體" pitchFamily="34" charset="-120"/>
                 <a:ea typeface="微軟正黑體" pitchFamily="34" charset="-120"/>
               </a:rPr>
-              <a:t>每</a:t>
-            </a:r>
-            <a:r>
-              <a:rPr lang="zh-TW" altLang="en-US" sz="5400" b="1" dirty="0">
-                <a:solidFill>
-                  <a:srgbClr val="660033"/>
-                </a:solidFill>
-                <a:latin typeface="微軟正黑體" pitchFamily="34" charset="-120"/>
-                <a:ea typeface="微軟正黑體" pitchFamily="34" charset="-120"/>
-              </a:rPr>
-              <a:t>個</a:t>
-            </a:r>
-            <a:r>
-              <a:rPr lang="zh-TW" altLang="en-US" sz="5400" b="1" dirty="0" smtClean="0">
-                <a:solidFill>
-                  <a:srgbClr val="660033"/>
-                </a:solidFill>
-                <a:latin typeface="微軟正黑體" pitchFamily="34" charset="-120"/>
-                <a:ea typeface="微軟正黑體" pitchFamily="34" charset="-120"/>
-              </a:rPr>
-              <a:t>腳步 我</a:t>
-            </a:r>
-            <a:r>
-              <a:rPr lang="zh-TW" altLang="en-US" sz="5400" b="1" dirty="0">
-                <a:solidFill>
-                  <a:srgbClr val="660033"/>
-                </a:solidFill>
-                <a:latin typeface="微軟正黑體" pitchFamily="34" charset="-120"/>
-                <a:ea typeface="微軟正黑體" pitchFamily="34" charset="-120"/>
-              </a:rPr>
-              <a:t>要緊緊</a:t>
-            </a:r>
-            <a:r>
-              <a:rPr lang="zh-TW" altLang="en-US" sz="5400" b="1" dirty="0" smtClean="0">
-                <a:solidFill>
-                  <a:srgbClr val="660033"/>
-                </a:solidFill>
-                <a:latin typeface="微軟正黑體" pitchFamily="34" charset="-120"/>
-                <a:ea typeface="微軟正黑體" pitchFamily="34" charset="-120"/>
-              </a:rPr>
-              <a:t>跟隨</a:t>
-            </a:r>
-            <a:endParaRPr lang="en-US" altLang="zh-TW" sz="5400" b="1" dirty="0" smtClean="0">
+              <a:t>在祢手中都將變成祝福</a:t>
+            </a:r>
+          </a:p>
+        </p:txBody>
+      </p:sp>
+      <p:sp>
+        <p:nvSpPr>
+          <p:cNvPr id="3" name="TextBox 2"/>
+          <p:cNvSpPr txBox="1"/>
+          <p:nvPr/>
+        </p:nvSpPr>
+        <p:spPr>
+          <a:xfrm>
+            <a:off x="0" y="5157193"/>
+            <a:ext cx="12192000" cy="666786"/>
+          </a:xfrm>
+          <a:prstGeom prst="rect">
+            <a:avLst/>
+          </a:prstGeom>
+          <a:noFill/>
+        </p:spPr>
+        <p:txBody>
+          <a:bodyPr wrap="square" rtlCol="0">
+            <a:spAutoFit/>
+          </a:bodyPr>
+          <a:lstStyle/>
+          <a:p>
+            <a:pPr algn="ctr"/>
+            <a:r>
+              <a:rPr lang="en-US" sz="3600" b="1" dirty="0">
+                <a:solidFill>
+                  <a:srgbClr val="660033"/>
+                </a:solidFill>
+                <a:latin typeface="Microsoft JhengHei" panose="020B0604030504040204" pitchFamily="34" charset="-120"/>
+                <a:ea typeface="Microsoft JhengHei" panose="020B0604030504040204" pitchFamily="34" charset="-120"/>
+              </a:rPr>
+              <a:t>( </a:t>
+            </a:r>
+            <a:r>
+              <a:rPr lang="zh-CN" altLang="en-US" sz="3600" b="1" dirty="0">
+                <a:solidFill>
+                  <a:srgbClr val="660033"/>
+                </a:solidFill>
+                <a:latin typeface="Microsoft JhengHei" panose="020B0604030504040204" pitchFamily="34" charset="-120"/>
+                <a:ea typeface="Microsoft JhengHei" panose="020B0604030504040204" pitchFamily="34" charset="-120"/>
+              </a:rPr>
+              <a:t>副歌</a:t>
+            </a:r>
+            <a:r>
+              <a:rPr lang="en-US" sz="3600" b="1" dirty="0">
+                <a:solidFill>
+                  <a:srgbClr val="660033"/>
+                </a:solidFill>
+                <a:latin typeface="Microsoft JhengHei" panose="020B0604030504040204" pitchFamily="34" charset="-120"/>
+                <a:ea typeface="Microsoft JhengHei" panose="020B0604030504040204" pitchFamily="34" charset="-120"/>
+              </a:rPr>
+              <a:t> 2 )</a:t>
+            </a:r>
+            <a:endParaRPr lang="vi-VN" sz="3600" b="1" dirty="0">
               <a:solidFill>
                 <a:srgbClr val="660033"/>
               </a:solidFill>
-              <a:latin typeface="微軟正黑體" pitchFamily="34" charset="-120"/>
-              <a:ea typeface="微軟正黑體" pitchFamily="34" charset="-120"/>
+              <a:ea typeface="Microsoft JhengHei" panose="020B0604030504040204" pitchFamily="34" charset="-120"/>
             </a:endParaRPr>
           </a:p>
-          <a:p>
-            <a:pPr algn="ctr">
-              <a:buNone/>
-            </a:pPr>
-            <a:r>
-              <a:rPr lang="zh-TW" altLang="en-US" sz="5400" b="1" dirty="0" smtClean="0">
-                <a:solidFill>
-                  <a:srgbClr val="660033"/>
-                </a:solidFill>
-                <a:latin typeface="微軟正黑體" pitchFamily="34" charset="-120"/>
-                <a:ea typeface="微軟正黑體" pitchFamily="34" charset="-120"/>
-              </a:rPr>
-              <a:t>走</a:t>
-            </a:r>
-            <a:r>
-              <a:rPr lang="zh-TW" altLang="en-US" sz="5400" b="1" dirty="0">
-                <a:solidFill>
-                  <a:srgbClr val="660033"/>
-                </a:solidFill>
-                <a:latin typeface="微軟正黑體" pitchFamily="34" charset="-120"/>
-                <a:ea typeface="微軟正黑體" pitchFamily="34" charset="-120"/>
-              </a:rPr>
-              <a:t>在蒙福的道路</a:t>
-            </a:r>
-          </a:p>
         </p:txBody>
       </p:sp>
     </p:spTree>
+    <p:extLst>
+      <p:ext uri="{BB962C8B-B14F-4D97-AF65-F5344CB8AC3E}">
+        <p14:creationId xmlns:p14="http://schemas.microsoft.com/office/powerpoint/2010/main" val="2322618977"/>
+      </p:ext>
+    </p:extLst>
   </p:cSld>
   <p:clrMapOvr>
     <a:masterClrMapping/>
@@ -3339,30 +3435,40 @@
       </p:grpSpPr>
       <p:sp>
         <p:nvSpPr>
-          <p:cNvPr id="4" name="標題 3"/>
-          <p:cNvSpPr>
-            <a:spLocks noGrp="1"/>
-          </p:cNvSpPr>
-          <p:nvPr>
-            <p:ph type="title"/>
-          </p:nvPr>
-        </p:nvSpPr>
-        <p:spPr/>
-        <p:txBody>
-          <a:bodyPr/>
-          <a:lstStyle/>
-          <a:p>
-            <a:r>
-              <a:rPr lang="zh-TW" altLang="en-US" b="1" dirty="0" smtClean="0">
+          <p:cNvPr id="5" name="內容版面配置區 4"/>
+          <p:cNvSpPr>
+            <a:spLocks noGrp="1"/>
+          </p:cNvSpPr>
+          <p:nvPr>
+            <p:ph idx="1"/>
+          </p:nvPr>
+        </p:nvSpPr>
+        <p:spPr>
+          <a:xfrm>
+            <a:off x="0" y="2084853"/>
+            <a:ext cx="12192000" cy="2404863"/>
+          </a:xfrm>
+        </p:spPr>
+        <p:txBody>
+          <a:bodyPr anchor="ctr">
+            <a:normAutofit/>
+          </a:bodyPr>
+          <a:lstStyle/>
+          <a:p>
+            <a:pPr algn="ctr">
+              <a:buNone/>
+            </a:pPr>
+            <a:r>
+              <a:rPr lang="zh-TW" altLang="en-US" sz="6600" b="1" dirty="0">
                 <a:solidFill>
                   <a:srgbClr val="660033"/>
                 </a:solidFill>
                 <a:latin typeface="微軟正黑體" pitchFamily="34" charset="-120"/>
                 <a:ea typeface="微軟正黑體" pitchFamily="34" charset="-120"/>
               </a:rPr>
-              <a:t>腳步</a:t>
-            </a:r>
-            <a:endParaRPr lang="zh-TW" altLang="en-US" b="1" dirty="0">
+              <a:t>祢的腳步 帶著我的腳步</a:t>
+            </a:r>
+            <a:endParaRPr lang="en-US" altLang="zh-TW" sz="6600" b="1" dirty="0">
               <a:solidFill>
                 <a:srgbClr val="660033"/>
               </a:solidFill>
@@ -3370,54 +3476,21 @@
               <a:ea typeface="微軟正黑體" pitchFamily="34" charset="-120"/>
             </a:endParaRPr>
           </a:p>
-        </p:txBody>
-      </p:sp>
-      <p:sp>
-        <p:nvSpPr>
-          <p:cNvPr id="5" name="內容版面配置區 4"/>
-          <p:cNvSpPr>
-            <a:spLocks noGrp="1"/>
-          </p:cNvSpPr>
-          <p:nvPr>
-            <p:ph idx="1"/>
-          </p:nvPr>
-        </p:nvSpPr>
-        <p:spPr>
-          <a:xfrm>
-            <a:off x="0" y="1600200"/>
-            <a:ext cx="9144000" cy="4525963"/>
-          </a:xfrm>
-        </p:spPr>
-        <p:txBody>
-          <a:bodyPr>
-            <a:noAutofit/>
-          </a:bodyPr>
-          <a:lstStyle/>
           <a:p>
             <a:pPr algn="ctr">
               <a:buNone/>
             </a:pPr>
             <a:r>
-              <a:rPr lang="zh-TW" altLang="en-US" sz="5400" b="1" dirty="0">
+              <a:rPr lang="zh-TW" altLang="en-US" sz="6600" b="1" dirty="0">
                 <a:solidFill>
                   <a:srgbClr val="660033"/>
                 </a:solidFill>
                 <a:latin typeface="微軟正黑體" pitchFamily="34" charset="-120"/>
                 <a:ea typeface="微軟正黑體" pitchFamily="34" charset="-120"/>
               </a:rPr>
-              <a:t>求給我更多的</a:t>
-            </a:r>
-            <a:r>
-              <a:rPr lang="zh-TW" altLang="en-US" sz="5400" b="1" dirty="0" smtClean="0">
-                <a:solidFill>
-                  <a:srgbClr val="660033"/>
-                </a:solidFill>
-                <a:latin typeface="微軟正黑體" pitchFamily="34" charset="-120"/>
-                <a:ea typeface="微軟正黑體" pitchFamily="34" charset="-120"/>
-              </a:rPr>
-              <a:t>勇氣</a:t>
-            </a:r>
-            <a:endParaRPr lang="en-US" altLang="zh-TW" sz="5400" b="1" dirty="0" smtClean="0">
+              <a:t>一步一步 都有祝福</a:t>
+            </a:r>
+            <a:endParaRPr lang="en-US" altLang="zh-TW" sz="6600" b="1" dirty="0">
               <a:solidFill>
                 <a:srgbClr val="660033"/>
               </a:solidFill>
@@ -3425,93 +3498,76 @@
               <a:ea typeface="微軟正黑體" pitchFamily="34" charset="-120"/>
             </a:endParaRPr>
           </a:p>
-          <a:p>
-            <a:pPr algn="ctr">
-              <a:buNone/>
-            </a:pPr>
-            <a:r>
-              <a:rPr lang="zh-TW" altLang="en-US" sz="5400" b="1" dirty="0" smtClean="0">
-                <a:solidFill>
-                  <a:srgbClr val="660033"/>
-                </a:solidFill>
-                <a:latin typeface="微軟正黑體" pitchFamily="34" charset="-120"/>
-                <a:ea typeface="微軟正黑體" pitchFamily="34" charset="-120"/>
-              </a:rPr>
-              <a:t>給</a:t>
-            </a:r>
-            <a:r>
-              <a:rPr lang="zh-TW" altLang="en-US" sz="5400" b="1" dirty="0">
-                <a:solidFill>
-                  <a:srgbClr val="660033"/>
-                </a:solidFill>
-                <a:latin typeface="微軟正黑體" pitchFamily="34" charset="-120"/>
-                <a:ea typeface="微軟正黑體" pitchFamily="34" charset="-120"/>
-              </a:rPr>
-              <a:t>我更多的</a:t>
-            </a:r>
-            <a:r>
-              <a:rPr lang="zh-TW" altLang="en-US" sz="5400" b="1" dirty="0" smtClean="0">
-                <a:solidFill>
-                  <a:srgbClr val="660033"/>
-                </a:solidFill>
-                <a:latin typeface="微軟正黑體" pitchFamily="34" charset="-120"/>
-                <a:ea typeface="微軟正黑體" pitchFamily="34" charset="-120"/>
-              </a:rPr>
-              <a:t>信心</a:t>
-            </a:r>
-            <a:endParaRPr lang="en-US" altLang="zh-TW" sz="5400" b="1" dirty="0" smtClean="0">
+        </p:txBody>
+      </p:sp>
+      <p:sp>
+        <p:nvSpPr>
+          <p:cNvPr id="3" name="TextBox 2"/>
+          <p:cNvSpPr txBox="1"/>
+          <p:nvPr/>
+        </p:nvSpPr>
+        <p:spPr>
+          <a:xfrm>
+            <a:off x="0" y="5157193"/>
+            <a:ext cx="12192000" cy="666786"/>
+          </a:xfrm>
+          <a:prstGeom prst="rect">
+            <a:avLst/>
+          </a:prstGeom>
+          <a:noFill/>
+        </p:spPr>
+        <p:txBody>
+          <a:bodyPr wrap="square" rtlCol="0">
+            <a:spAutoFit/>
+          </a:bodyPr>
+          <a:lstStyle/>
+          <a:p>
+            <a:pPr algn="ctr"/>
+            <a:r>
+              <a:rPr lang="en-US" sz="3600" b="1" dirty="0">
+                <a:solidFill>
+                  <a:srgbClr val="660033"/>
+                </a:solidFill>
+                <a:latin typeface="Microsoft JhengHei" panose="020B0604030504040204" pitchFamily="34" charset="-120"/>
+                <a:ea typeface="Microsoft JhengHei" panose="020B0604030504040204" pitchFamily="34" charset="-120"/>
+              </a:rPr>
+              <a:t>( </a:t>
+            </a:r>
+            <a:r>
+              <a:rPr lang="zh-CN" altLang="en-US" sz="3600" b="1" dirty="0">
+                <a:solidFill>
+                  <a:srgbClr val="660033"/>
+                </a:solidFill>
+                <a:latin typeface="Microsoft JhengHei" panose="020B0604030504040204" pitchFamily="34" charset="-120"/>
+                <a:ea typeface="Microsoft JhengHei" panose="020B0604030504040204" pitchFamily="34" charset="-120"/>
+              </a:rPr>
+              <a:t>正歌</a:t>
+            </a:r>
+            <a:r>
+              <a:rPr lang="en-US" sz="3600" b="1" dirty="0">
+                <a:solidFill>
+                  <a:srgbClr val="660033"/>
+                </a:solidFill>
+                <a:latin typeface="Microsoft JhengHei" panose="020B0604030504040204" pitchFamily="34" charset="-120"/>
+                <a:ea typeface="Microsoft JhengHei" panose="020B0604030504040204" pitchFamily="34" charset="-120"/>
+              </a:rPr>
+              <a:t> )</a:t>
+            </a:r>
+            <a:endParaRPr lang="vi-VN" sz="3600" b="1" dirty="0">
               <a:solidFill>
                 <a:srgbClr val="660033"/>
               </a:solidFill>
-              <a:latin typeface="微軟正黑體" pitchFamily="34" charset="-120"/>
-              <a:ea typeface="微軟正黑體" pitchFamily="34" charset="-120"/>
+              <a:ea typeface="Microsoft JhengHei" panose="020B0604030504040204" pitchFamily="34" charset="-120"/>
             </a:endParaRPr>
           </a:p>
-          <a:p>
-            <a:pPr algn="ctr">
-              <a:buNone/>
-            </a:pPr>
-            <a:r>
-              <a:rPr lang="zh-TW" altLang="en-US" sz="5400" b="1" dirty="0" smtClean="0">
-                <a:solidFill>
-                  <a:srgbClr val="660033"/>
-                </a:solidFill>
-                <a:latin typeface="微軟正黑體" pitchFamily="34" charset="-120"/>
-                <a:ea typeface="微軟正黑體" pitchFamily="34" charset="-120"/>
-              </a:rPr>
-              <a:t>讓</a:t>
-            </a:r>
-            <a:r>
-              <a:rPr lang="zh-TW" altLang="en-US" sz="5400" b="1" dirty="0">
-                <a:solidFill>
-                  <a:srgbClr val="660033"/>
-                </a:solidFill>
-                <a:latin typeface="微軟正黑體" pitchFamily="34" charset="-120"/>
-                <a:ea typeface="微軟正黑體" pitchFamily="34" charset="-120"/>
-              </a:rPr>
-              <a:t>我勇敢踏出跟隨你的</a:t>
-            </a:r>
-            <a:r>
-              <a:rPr lang="zh-TW" altLang="en-US" sz="5400" b="1" dirty="0" smtClean="0">
-                <a:solidFill>
-                  <a:srgbClr val="660033"/>
-                </a:solidFill>
-                <a:latin typeface="微軟正黑體" pitchFamily="34" charset="-120"/>
-                <a:ea typeface="微軟正黑體" pitchFamily="34" charset="-120"/>
-              </a:rPr>
-              <a:t>腳步</a:t>
-            </a:r>
-            <a:endParaRPr lang="zh-TW" altLang="en-US" sz="5400" b="1" dirty="0">
-              <a:solidFill>
-                <a:srgbClr val="660033"/>
-              </a:solidFill>
-              <a:latin typeface="微軟正黑體" pitchFamily="34" charset="-120"/>
-              <a:ea typeface="微軟正黑體" pitchFamily="34" charset="-120"/>
-            </a:endParaRPr>
-          </a:p>
         </p:txBody>
       </p:sp>
     </p:spTree>
+    <p:extLst>
+      <p:ext uri="{BB962C8B-B14F-4D97-AF65-F5344CB8AC3E}">
+        <p14:creationId xmlns:p14="http://schemas.microsoft.com/office/powerpoint/2010/main" val="3314567182"/>
+      </p:ext>
+    </p:extLst>
   </p:cSld>
   <p:clrMapOvr>
     <a:masterClrMapping/>
@@ -3538,30 +3594,40 @@
       </p:grpSpPr>
       <p:sp>
         <p:nvSpPr>
-          <p:cNvPr id="4" name="標題 3"/>
-          <p:cNvSpPr>
-            <a:spLocks noGrp="1"/>
-          </p:cNvSpPr>
-          <p:nvPr>
-            <p:ph type="title"/>
-          </p:nvPr>
-        </p:nvSpPr>
-        <p:spPr/>
-        <p:txBody>
-          <a:bodyPr/>
-          <a:lstStyle/>
-          <a:p>
-            <a:r>
-              <a:rPr lang="zh-TW" altLang="en-US" b="1" dirty="0" smtClean="0">
+          <p:cNvPr id="5" name="內容版面配置區 4"/>
+          <p:cNvSpPr>
+            <a:spLocks noGrp="1"/>
+          </p:cNvSpPr>
+          <p:nvPr>
+            <p:ph idx="1"/>
+          </p:nvPr>
+        </p:nvSpPr>
+        <p:spPr>
+          <a:xfrm>
+            <a:off x="0" y="2084853"/>
+            <a:ext cx="12192000" cy="2404863"/>
+          </a:xfrm>
+        </p:spPr>
+        <p:txBody>
+          <a:bodyPr anchor="ctr">
+            <a:normAutofit/>
+          </a:bodyPr>
+          <a:lstStyle/>
+          <a:p>
+            <a:pPr algn="ctr">
+              <a:buNone/>
+            </a:pPr>
+            <a:r>
+              <a:rPr lang="zh-TW" altLang="en-US" sz="6600" b="1" dirty="0">
                 <a:solidFill>
                   <a:srgbClr val="660033"/>
                 </a:solidFill>
                 <a:latin typeface="微軟正黑體" pitchFamily="34" charset="-120"/>
                 <a:ea typeface="微軟正黑體" pitchFamily="34" charset="-120"/>
               </a:rPr>
-              <a:t>腳步</a:t>
-            </a:r>
-            <a:endParaRPr lang="zh-TW" altLang="en-US" b="1" dirty="0">
+              <a:t>每個腳步 我要緊緊跟隨</a:t>
+            </a:r>
+            <a:endParaRPr lang="en-US" altLang="zh-TW" sz="6600" b="1" dirty="0">
               <a:solidFill>
                 <a:srgbClr val="660033"/>
               </a:solidFill>
@@ -3569,131 +3635,91 @@
               <a:ea typeface="微軟正黑體" pitchFamily="34" charset="-120"/>
             </a:endParaRPr>
           </a:p>
-        </p:txBody>
-      </p:sp>
-      <p:sp>
-        <p:nvSpPr>
-          <p:cNvPr id="5" name="內容版面配置區 4"/>
-          <p:cNvSpPr>
-            <a:spLocks noGrp="1"/>
-          </p:cNvSpPr>
-          <p:nvPr>
-            <p:ph idx="1"/>
-          </p:nvPr>
+          <a:p>
+            <a:pPr algn="ctr">
+              <a:buNone/>
+            </a:pPr>
+            <a:r>
+              <a:rPr lang="zh-TW" altLang="en-US" sz="6600" b="1" dirty="0">
+                <a:solidFill>
+                  <a:srgbClr val="660033"/>
+                </a:solidFill>
+                <a:latin typeface="微軟正黑體" pitchFamily="34" charset="-120"/>
+                <a:ea typeface="微軟正黑體" pitchFamily="34" charset="-120"/>
+              </a:rPr>
+              <a:t>走在蒙福的道路</a:t>
+            </a:r>
+          </a:p>
+        </p:txBody>
+      </p:sp>
+      <p:sp>
+        <p:nvSpPr>
+          <p:cNvPr id="3" name="TextBox 2"/>
+          <p:cNvSpPr txBox="1"/>
+          <p:nvPr/>
         </p:nvSpPr>
         <p:spPr>
           <a:xfrm>
-            <a:off x="0" y="1600200"/>
-            <a:ext cx="9144000" cy="4525963"/>
+            <a:off x="0" y="5157193"/>
+            <a:ext cx="12192000" cy="666786"/>
           </a:xfrm>
+          <a:prstGeom prst="rect">
+            <a:avLst/>
+          </a:prstGeom>
+          <a:noFill/>
         </p:spPr>
         <p:txBody>
-          <a:bodyPr>
-            <a:noAutofit/>
+          <a:bodyPr wrap="square" rtlCol="0">
+            <a:spAutoFit/>
           </a:bodyPr>
           <a:lstStyle/>
           <a:p>
-            <a:pPr algn="ctr">
-              <a:buNone/>
-            </a:pPr>
-            <a:r>
-              <a:rPr lang="zh-TW" altLang="en-US" sz="5400" b="1" dirty="0">
-                <a:solidFill>
-                  <a:srgbClr val="660033"/>
-                </a:solidFill>
-                <a:latin typeface="微軟正黑體" pitchFamily="34" charset="-120"/>
-                <a:ea typeface="微軟正黑體" pitchFamily="34" charset="-120"/>
-              </a:rPr>
-              <a:t>跟你行在水面</a:t>
-            </a:r>
-            <a:r>
-              <a:rPr lang="zh-TW" altLang="en-US" sz="5400" b="1" dirty="0" smtClean="0">
-                <a:solidFill>
-                  <a:srgbClr val="660033"/>
-                </a:solidFill>
-                <a:latin typeface="微軟正黑體" pitchFamily="34" charset="-120"/>
-                <a:ea typeface="微軟正黑體" pitchFamily="34" charset="-120"/>
-              </a:rPr>
-              <a:t>上</a:t>
-            </a:r>
-            <a:endParaRPr lang="en-US" altLang="zh-TW" sz="5400" b="1" dirty="0" smtClean="0">
+            <a:pPr algn="ctr"/>
+            <a:r>
+              <a:rPr lang="en-US" sz="3600" b="1" dirty="0">
+                <a:solidFill>
+                  <a:srgbClr val="660033"/>
+                </a:solidFill>
+                <a:latin typeface="Microsoft JhengHei" panose="020B0604030504040204" pitchFamily="34" charset="-120"/>
+                <a:ea typeface="Microsoft JhengHei" panose="020B0604030504040204" pitchFamily="34" charset="-120"/>
+              </a:rPr>
+              <a:t>( </a:t>
+            </a:r>
+            <a:r>
+              <a:rPr lang="zh-CN" altLang="en-US" sz="3600" b="1" dirty="0">
+                <a:solidFill>
+                  <a:srgbClr val="660033"/>
+                </a:solidFill>
+                <a:latin typeface="Microsoft JhengHei" panose="020B0604030504040204" pitchFamily="34" charset="-120"/>
+                <a:ea typeface="Microsoft JhengHei" panose="020B0604030504040204" pitchFamily="34" charset="-120"/>
+              </a:rPr>
+              <a:t>正歌</a:t>
+            </a:r>
+            <a:r>
+              <a:rPr lang="en-US" sz="3600" b="1" dirty="0">
+                <a:solidFill>
+                  <a:srgbClr val="660033"/>
+                </a:solidFill>
+                <a:latin typeface="Microsoft JhengHei" panose="020B0604030504040204" pitchFamily="34" charset="-120"/>
+                <a:ea typeface="Microsoft JhengHei" panose="020B0604030504040204" pitchFamily="34" charset="-120"/>
+              </a:rPr>
+              <a:t> )</a:t>
+            </a:r>
+            <a:endParaRPr lang="vi-VN" sz="3600" b="1" dirty="0">
               <a:solidFill>
                 <a:srgbClr val="660033"/>
               </a:solidFill>
-              <a:latin typeface="微軟正黑體" pitchFamily="34" charset="-120"/>
-              <a:ea typeface="微軟正黑體" pitchFamily="34" charset="-120"/>
+              <a:ea typeface="Microsoft JhengHei" panose="020B0604030504040204" pitchFamily="34" charset="-120"/>
             </a:endParaRPr>
           </a:p>
-          <a:p>
-            <a:pPr algn="ctr">
-              <a:buNone/>
-            </a:pPr>
-            <a:r>
-              <a:rPr lang="zh-TW" altLang="en-US" sz="5400" b="1" dirty="0" smtClean="0">
-                <a:solidFill>
-                  <a:srgbClr val="660033"/>
-                </a:solidFill>
-                <a:latin typeface="微軟正黑體" pitchFamily="34" charset="-120"/>
-                <a:ea typeface="微軟正黑體" pitchFamily="34" charset="-120"/>
-              </a:rPr>
-              <a:t>跟</a:t>
-            </a:r>
-            <a:r>
-              <a:rPr lang="zh-TW" altLang="en-US" sz="5400" b="1" dirty="0">
-                <a:solidFill>
-                  <a:srgbClr val="660033"/>
-                </a:solidFill>
-                <a:latin typeface="微軟正黑體" pitchFamily="34" charset="-120"/>
-                <a:ea typeface="微軟正黑體" pitchFamily="34" charset="-120"/>
-              </a:rPr>
-              <a:t>你走在曠</a:t>
-            </a:r>
-            <a:r>
-              <a:rPr lang="zh-TW" altLang="en-US" sz="5400" b="1" dirty="0" smtClean="0">
-                <a:solidFill>
-                  <a:srgbClr val="660033"/>
-                </a:solidFill>
-                <a:latin typeface="微軟正黑體" pitchFamily="34" charset="-120"/>
-                <a:ea typeface="微軟正黑體" pitchFamily="34" charset="-120"/>
-              </a:rPr>
-              <a:t>野地</a:t>
-            </a:r>
-            <a:endParaRPr lang="en-US" altLang="zh-TW" sz="5400" b="1" dirty="0" smtClean="0">
-              <a:solidFill>
-                <a:srgbClr val="660033"/>
-              </a:solidFill>
-              <a:latin typeface="微軟正黑體" pitchFamily="34" charset="-120"/>
-              <a:ea typeface="微軟正黑體" pitchFamily="34" charset="-120"/>
-            </a:endParaRPr>
-          </a:p>
-          <a:p>
-            <a:pPr algn="ctr">
-              <a:buNone/>
-            </a:pPr>
-            <a:r>
-              <a:rPr lang="zh-TW" altLang="en-US" sz="5400" b="1" dirty="0" smtClean="0">
-                <a:solidFill>
-                  <a:srgbClr val="660033"/>
-                </a:solidFill>
-                <a:latin typeface="微軟正黑體" pitchFamily="34" charset="-120"/>
-                <a:ea typeface="微軟正黑體" pitchFamily="34" charset="-120"/>
-              </a:rPr>
-              <a:t>曲曲折折</a:t>
-            </a:r>
-            <a:r>
-              <a:rPr lang="zh-TW" altLang="en-US" sz="5400" b="1" dirty="0">
-                <a:solidFill>
-                  <a:srgbClr val="660033"/>
-                </a:solidFill>
-                <a:latin typeface="微軟正黑體" pitchFamily="34" charset="-120"/>
-                <a:ea typeface="微軟正黑體" pitchFamily="34" charset="-120"/>
-              </a:rPr>
-              <a:t>我也不在乎</a:t>
-            </a:r>
-          </a:p>
         </p:txBody>
       </p:sp>
     </p:spTree>
+    <p:extLst>
+      <p:ext uri="{BB962C8B-B14F-4D97-AF65-F5344CB8AC3E}">
+        <p14:creationId xmlns:p14="http://schemas.microsoft.com/office/powerpoint/2010/main" val="2373124815"/>
+      </p:ext>
+    </p:extLst>
   </p:cSld>
   <p:clrMapOvr>
     <a:masterClrMapping/>
@@ -3720,30 +3746,40 @@
       </p:grpSpPr>
       <p:sp>
         <p:nvSpPr>
-          <p:cNvPr id="4" name="標題 3"/>
-          <p:cNvSpPr>
-            <a:spLocks noGrp="1"/>
-          </p:cNvSpPr>
-          <p:nvPr>
-            <p:ph type="title"/>
-          </p:nvPr>
-        </p:nvSpPr>
-        <p:spPr/>
-        <p:txBody>
-          <a:bodyPr/>
-          <a:lstStyle/>
-          <a:p>
-            <a:r>
-              <a:rPr lang="zh-TW" altLang="en-US" b="1" dirty="0" smtClean="0">
+          <p:cNvPr id="5" name="內容版面配置區 4"/>
+          <p:cNvSpPr>
+            <a:spLocks noGrp="1"/>
+          </p:cNvSpPr>
+          <p:nvPr>
+            <p:ph idx="1"/>
+          </p:nvPr>
+        </p:nvSpPr>
+        <p:spPr>
+          <a:xfrm>
+            <a:off x="0" y="2084853"/>
+            <a:ext cx="12192000" cy="2404863"/>
+          </a:xfrm>
+        </p:spPr>
+        <p:txBody>
+          <a:bodyPr anchor="ctr">
+            <a:normAutofit/>
+          </a:bodyPr>
+          <a:lstStyle/>
+          <a:p>
+            <a:pPr algn="ctr">
+              <a:buNone/>
+            </a:pPr>
+            <a:r>
+              <a:rPr lang="zh-TW" altLang="en-US" sz="6600" b="1" dirty="0">
                 <a:solidFill>
                   <a:srgbClr val="660033"/>
                 </a:solidFill>
                 <a:latin typeface="微軟正黑體" pitchFamily="34" charset="-120"/>
                 <a:ea typeface="微軟正黑體" pitchFamily="34" charset="-120"/>
               </a:rPr>
-              <a:t>腳步</a:t>
-            </a:r>
-            <a:endParaRPr lang="zh-TW" altLang="en-US" b="1" dirty="0">
+              <a:t>求給我更多的勇氣</a:t>
+            </a:r>
+            <a:endParaRPr lang="en-US" altLang="zh-TW" sz="6600" b="1" dirty="0">
               <a:solidFill>
                 <a:srgbClr val="660033"/>
               </a:solidFill>
@@ -3751,54 +3787,21 @@
               <a:ea typeface="微軟正黑體" pitchFamily="34" charset="-120"/>
             </a:endParaRPr>
           </a:p>
-        </p:txBody>
-      </p:sp>
-      <p:sp>
-        <p:nvSpPr>
-          <p:cNvPr id="5" name="內容版面配置區 4"/>
-          <p:cNvSpPr>
-            <a:spLocks noGrp="1"/>
-          </p:cNvSpPr>
-          <p:nvPr>
-            <p:ph idx="1"/>
-          </p:nvPr>
-        </p:nvSpPr>
-        <p:spPr>
-          <a:xfrm>
-            <a:off x="0" y="1600200"/>
-            <a:ext cx="9144000" cy="4525963"/>
-          </a:xfrm>
-        </p:spPr>
-        <p:txBody>
-          <a:bodyPr>
-            <a:noAutofit/>
-          </a:bodyPr>
-          <a:lstStyle/>
           <a:p>
             <a:pPr algn="ctr">
               <a:buNone/>
             </a:pPr>
             <a:r>
-              <a:rPr lang="zh-TW" altLang="en-US" sz="5400" b="1" dirty="0">
+              <a:rPr lang="zh-TW" altLang="en-US" sz="6600" b="1" dirty="0">
                 <a:solidFill>
                   <a:srgbClr val="660033"/>
                 </a:solidFill>
                 <a:latin typeface="微軟正黑體" pitchFamily="34" charset="-120"/>
                 <a:ea typeface="微軟正黑體" pitchFamily="34" charset="-120"/>
               </a:rPr>
-              <a:t>我只要更多信靠</a:t>
-            </a:r>
-            <a:r>
-              <a:rPr lang="zh-TW" altLang="en-US" sz="5400" b="1" dirty="0" smtClean="0">
-                <a:solidFill>
-                  <a:srgbClr val="660033"/>
-                </a:solidFill>
-                <a:latin typeface="微軟正黑體" pitchFamily="34" charset="-120"/>
-                <a:ea typeface="微軟正黑體" pitchFamily="34" charset="-120"/>
-              </a:rPr>
-              <a:t>你</a:t>
-            </a:r>
-            <a:endParaRPr lang="en-US" altLang="zh-TW" sz="5400" b="1" dirty="0" smtClean="0">
+              <a:t>給我更多的信心</a:t>
+            </a:r>
+            <a:endParaRPr lang="en-US" altLang="zh-TW" sz="6600" b="1" dirty="0">
               <a:solidFill>
                 <a:srgbClr val="660033"/>
               </a:solidFill>
@@ -3806,76 +3809,86 @@
               <a:ea typeface="微軟正黑體" pitchFamily="34" charset="-120"/>
             </a:endParaRPr>
           </a:p>
-          <a:p>
-            <a:pPr algn="ctr">
-              <a:buNone/>
-            </a:pPr>
-            <a:r>
-              <a:rPr lang="zh-TW" altLang="en-US" sz="5400" b="1" dirty="0" smtClean="0">
-                <a:solidFill>
-                  <a:srgbClr val="660033"/>
-                </a:solidFill>
-                <a:latin typeface="微軟正黑體" pitchFamily="34" charset="-120"/>
-                <a:ea typeface="微軟正黑體" pitchFamily="34" charset="-120"/>
-              </a:rPr>
-              <a:t>只要</a:t>
-            </a:r>
-            <a:r>
-              <a:rPr lang="zh-TW" altLang="en-US" sz="5400" b="1" dirty="0">
-                <a:solidFill>
-                  <a:srgbClr val="660033"/>
-                </a:solidFill>
-                <a:latin typeface="微軟正黑體" pitchFamily="34" charset="-120"/>
-                <a:ea typeface="微軟正黑體" pitchFamily="34" charset="-120"/>
-              </a:rPr>
-              <a:t>更多順服</a:t>
-            </a:r>
-            <a:r>
-              <a:rPr lang="zh-TW" altLang="en-US" sz="5400" b="1" dirty="0" smtClean="0">
-                <a:solidFill>
-                  <a:srgbClr val="660033"/>
-                </a:solidFill>
-                <a:latin typeface="微軟正黑體" pitchFamily="34" charset="-120"/>
-                <a:ea typeface="微軟正黑體" pitchFamily="34" charset="-120"/>
-              </a:rPr>
-              <a:t>你</a:t>
-            </a:r>
-            <a:endParaRPr lang="en-US" altLang="zh-TW" sz="5400" b="1" dirty="0" smtClean="0">
+        </p:txBody>
+      </p:sp>
+      <p:sp>
+        <p:nvSpPr>
+          <p:cNvPr id="3" name="TextBox 2"/>
+          <p:cNvSpPr txBox="1"/>
+          <p:nvPr/>
+        </p:nvSpPr>
+        <p:spPr>
+          <a:xfrm>
+            <a:off x="0" y="5157193"/>
+            <a:ext cx="12192000" cy="666786"/>
+          </a:xfrm>
+          <a:prstGeom prst="rect">
+            <a:avLst/>
+          </a:prstGeom>
+          <a:noFill/>
+        </p:spPr>
+        <p:txBody>
+          <a:bodyPr wrap="square" rtlCol="0">
+            <a:spAutoFit/>
+          </a:bodyPr>
+          <a:lstStyle/>
+          <a:p>
+            <a:pPr algn="ctr"/>
+            <a:r>
+              <a:rPr lang="en-US" sz="3600" b="1" dirty="0">
+                <a:solidFill>
+                  <a:srgbClr val="660033"/>
+                </a:solidFill>
+                <a:latin typeface="Microsoft JhengHei" panose="020B0604030504040204" pitchFamily="34" charset="-120"/>
+                <a:ea typeface="Microsoft JhengHei" panose="020B0604030504040204" pitchFamily="34" charset="-120"/>
+              </a:rPr>
+              <a:t>( </a:t>
+            </a:r>
+            <a:r>
+              <a:rPr lang="zh-CN" altLang="en-US" sz="3600" b="1" dirty="0">
+                <a:solidFill>
+                  <a:srgbClr val="660033"/>
+                </a:solidFill>
+                <a:latin typeface="Microsoft JhengHei" panose="020B0604030504040204" pitchFamily="34" charset="-120"/>
+                <a:ea typeface="Microsoft JhengHei" panose="020B0604030504040204" pitchFamily="34" charset="-120"/>
+              </a:rPr>
+              <a:t>副歌 </a:t>
+            </a:r>
+            <a:r>
+              <a:rPr lang="en-US" altLang="zh-CN" sz="3600" b="1" dirty="0">
+                <a:solidFill>
+                  <a:srgbClr val="660033"/>
+                </a:solidFill>
+                <a:latin typeface="Microsoft JhengHei" panose="020B0604030504040204" pitchFamily="34" charset="-120"/>
+                <a:ea typeface="Microsoft JhengHei" panose="020B0604030504040204" pitchFamily="34" charset="-120"/>
+              </a:rPr>
+              <a:t>1</a:t>
+            </a:r>
+            <a:r>
+              <a:rPr lang="en-US" sz="3600" b="1" dirty="0">
+                <a:solidFill>
+                  <a:srgbClr val="660033"/>
+                </a:solidFill>
+                <a:latin typeface="Microsoft JhengHei" panose="020B0604030504040204" pitchFamily="34" charset="-120"/>
+                <a:ea typeface="Microsoft JhengHei" panose="020B0604030504040204" pitchFamily="34" charset="-120"/>
+              </a:rPr>
+              <a:t> )</a:t>
+            </a:r>
+            <a:endParaRPr lang="vi-VN" sz="3600" b="1" dirty="0">
               <a:solidFill>
                 <a:srgbClr val="660033"/>
               </a:solidFill>
-              <a:latin typeface="微軟正黑體" pitchFamily="34" charset="-120"/>
-              <a:ea typeface="微軟正黑體" pitchFamily="34" charset="-120"/>
+              <a:ea typeface="Microsoft JhengHei" panose="020B0604030504040204" pitchFamily="34" charset="-120"/>
             </a:endParaRPr>
           </a:p>
-          <a:p>
-            <a:pPr algn="ctr">
-              <a:buNone/>
-            </a:pPr>
-            <a:r>
-              <a:rPr lang="zh-TW" altLang="en-US" sz="5400" b="1" dirty="0" smtClean="0">
-                <a:solidFill>
-                  <a:srgbClr val="660033"/>
-                </a:solidFill>
-                <a:latin typeface="微軟正黑體" pitchFamily="34" charset="-120"/>
-                <a:ea typeface="微軟正黑體" pitchFamily="34" charset="-120"/>
-              </a:rPr>
-              <a:t>凡是</a:t>
-            </a:r>
-            <a:r>
-              <a:rPr lang="zh-TW" altLang="en-US" sz="5400" b="1" dirty="0">
-                <a:solidFill>
-                  <a:srgbClr val="660033"/>
-                </a:solidFill>
-                <a:latin typeface="微軟正黑體" pitchFamily="34" charset="-120"/>
-                <a:ea typeface="微軟正黑體" pitchFamily="34" charset="-120"/>
-              </a:rPr>
-              <a:t>出於你的我就默然不語</a:t>
-            </a:r>
-          </a:p>
         </p:txBody>
       </p:sp>
     </p:spTree>
+    <p:extLst>
+      <p:ext uri="{BB962C8B-B14F-4D97-AF65-F5344CB8AC3E}">
+        <p14:creationId xmlns:p14="http://schemas.microsoft.com/office/powerpoint/2010/main" val="2453486028"/>
+      </p:ext>
+    </p:extLst>
   </p:cSld>
   <p:clrMapOvr>
     <a:masterClrMapping/>
@@ -3902,162 +3915,120 @@
       </p:grpSpPr>
       <p:sp>
         <p:nvSpPr>
-          <p:cNvPr id="4" name="標題 3"/>
-          <p:cNvSpPr>
-            <a:spLocks noGrp="1"/>
-          </p:cNvSpPr>
-          <p:nvPr>
-            <p:ph type="title"/>
-          </p:nvPr>
-        </p:nvSpPr>
-        <p:spPr/>
-        <p:txBody>
-          <a:bodyPr/>
-          <a:lstStyle/>
-          <a:p>
-            <a:r>
-              <a:rPr lang="zh-TW" altLang="en-US" b="1" dirty="0" smtClean="0">
+          <p:cNvPr id="5" name="內容版面配置區 4"/>
+          <p:cNvSpPr>
+            <a:spLocks noGrp="1"/>
+          </p:cNvSpPr>
+          <p:nvPr>
+            <p:ph idx="1"/>
+          </p:nvPr>
+        </p:nvSpPr>
+        <p:spPr>
+          <a:xfrm>
+            <a:off x="0" y="2084853"/>
+            <a:ext cx="12192000" cy="2404863"/>
+          </a:xfrm>
+        </p:spPr>
+        <p:txBody>
+          <a:bodyPr anchor="ctr">
+            <a:normAutofit/>
+          </a:bodyPr>
+          <a:lstStyle/>
+          <a:p>
+            <a:pPr algn="ctr">
+              <a:buNone/>
+            </a:pPr>
+            <a:r>
+              <a:rPr lang="zh-TW" altLang="en-US" sz="6600" b="1" dirty="0">
                 <a:solidFill>
                   <a:srgbClr val="660033"/>
                 </a:solidFill>
                 <a:latin typeface="微軟正黑體" pitchFamily="34" charset="-120"/>
                 <a:ea typeface="微軟正黑體" pitchFamily="34" charset="-120"/>
               </a:rPr>
-              <a:t>腳步</a:t>
-            </a:r>
-            <a:endParaRPr lang="zh-TW" altLang="en-US" b="1" dirty="0">
+              <a:t>讓我勇敢踏出跟隨祢的腳步</a:t>
+            </a:r>
+          </a:p>
+        </p:txBody>
+      </p:sp>
+      <p:sp>
+        <p:nvSpPr>
+          <p:cNvPr id="3" name="TextBox 2"/>
+          <p:cNvSpPr txBox="1"/>
+          <p:nvPr/>
+        </p:nvSpPr>
+        <p:spPr>
+          <a:xfrm>
+            <a:off x="0" y="5157193"/>
+            <a:ext cx="12192000" cy="666786"/>
+          </a:xfrm>
+          <a:prstGeom prst="rect">
+            <a:avLst/>
+          </a:prstGeom>
+          <a:noFill/>
+        </p:spPr>
+        <p:txBody>
+          <a:bodyPr wrap="square" rtlCol="0">
+            <a:spAutoFit/>
+          </a:bodyPr>
+          <a:lstStyle/>
+          <a:p>
+            <a:pPr algn="ctr"/>
+            <a:r>
+              <a:rPr lang="en-US" sz="3600" b="1" dirty="0">
+                <a:solidFill>
+                  <a:srgbClr val="660033"/>
+                </a:solidFill>
+                <a:latin typeface="Microsoft JhengHei" panose="020B0604030504040204" pitchFamily="34" charset="-120"/>
+                <a:ea typeface="Microsoft JhengHei" panose="020B0604030504040204" pitchFamily="34" charset="-120"/>
+              </a:rPr>
+              <a:t>( </a:t>
+            </a:r>
+            <a:r>
+              <a:rPr lang="zh-CN" altLang="en-US" sz="3600" b="1" dirty="0">
+                <a:solidFill>
+                  <a:srgbClr val="660033"/>
+                </a:solidFill>
+                <a:latin typeface="Microsoft JhengHei" panose="020B0604030504040204" pitchFamily="34" charset="-120"/>
+                <a:ea typeface="Microsoft JhengHei" panose="020B0604030504040204" pitchFamily="34" charset="-120"/>
+              </a:rPr>
+              <a:t>副歌 </a:t>
+            </a:r>
+            <a:r>
+              <a:rPr lang="en-US" altLang="zh-CN" sz="3600" b="1" dirty="0">
+                <a:solidFill>
+                  <a:srgbClr val="660033"/>
+                </a:solidFill>
+                <a:latin typeface="Microsoft JhengHei" panose="020B0604030504040204" pitchFamily="34" charset="-120"/>
+                <a:ea typeface="Microsoft JhengHei" panose="020B0604030504040204" pitchFamily="34" charset="-120"/>
+              </a:rPr>
+              <a:t>1</a:t>
+            </a:r>
+            <a:r>
+              <a:rPr lang="en-US" sz="3600" b="1" dirty="0">
+                <a:solidFill>
+                  <a:srgbClr val="660033"/>
+                </a:solidFill>
+                <a:latin typeface="Microsoft JhengHei" panose="020B0604030504040204" pitchFamily="34" charset="-120"/>
+                <a:ea typeface="Microsoft JhengHei" panose="020B0604030504040204" pitchFamily="34" charset="-120"/>
+              </a:rPr>
+              <a:t> )</a:t>
+            </a:r>
+            <a:endParaRPr lang="vi-VN" sz="3600" b="1" dirty="0">
               <a:solidFill>
                 <a:srgbClr val="660033"/>
               </a:solidFill>
-              <a:latin typeface="微軟正黑體" pitchFamily="34" charset="-120"/>
-              <a:ea typeface="微軟正黑體" pitchFamily="34" charset="-120"/>
+              <a:ea typeface="Microsoft JhengHei" panose="020B0604030504040204" pitchFamily="34" charset="-120"/>
             </a:endParaRPr>
           </a:p>
         </p:txBody>
       </p:sp>
-      <p:sp>
-        <p:nvSpPr>
-          <p:cNvPr id="5" name="內容版面配置區 4"/>
-          <p:cNvSpPr>
-            <a:spLocks noGrp="1"/>
-          </p:cNvSpPr>
-          <p:nvPr>
-            <p:ph idx="1"/>
-          </p:nvPr>
-        </p:nvSpPr>
-        <p:spPr>
-          <a:xfrm>
-            <a:off x="0" y="1600200"/>
-            <a:ext cx="9144000" cy="4525963"/>
-          </a:xfrm>
-        </p:spPr>
-        <p:txBody>
-          <a:bodyPr>
-            <a:noAutofit/>
-          </a:bodyPr>
-          <a:lstStyle/>
-          <a:p>
-            <a:pPr algn="ctr">
-              <a:buNone/>
-            </a:pPr>
-            <a:r>
-              <a:rPr lang="zh-TW" altLang="en-US" sz="5400" b="1" dirty="0">
-                <a:solidFill>
-                  <a:srgbClr val="660033"/>
-                </a:solidFill>
-                <a:latin typeface="微軟正黑體" pitchFamily="34" charset="-120"/>
-                <a:ea typeface="微軟正黑體" pitchFamily="34" charset="-120"/>
-              </a:rPr>
-              <a:t>就算經過黑暗</a:t>
-            </a:r>
-            <a:r>
-              <a:rPr lang="zh-TW" altLang="en-US" sz="5400" b="1" dirty="0" smtClean="0">
-                <a:solidFill>
-                  <a:srgbClr val="660033"/>
-                </a:solidFill>
-                <a:latin typeface="微軟正黑體" pitchFamily="34" charset="-120"/>
-                <a:ea typeface="微軟正黑體" pitchFamily="34" charset="-120"/>
-              </a:rPr>
-              <a:t>谷</a:t>
-            </a:r>
-            <a:endParaRPr lang="en-US" altLang="zh-TW" sz="5400" b="1" dirty="0" smtClean="0">
-              <a:solidFill>
-                <a:srgbClr val="660033"/>
-              </a:solidFill>
-              <a:latin typeface="微軟正黑體" pitchFamily="34" charset="-120"/>
-              <a:ea typeface="微軟正黑體" pitchFamily="34" charset="-120"/>
-            </a:endParaRPr>
-          </a:p>
-          <a:p>
-            <a:pPr algn="ctr">
-              <a:buNone/>
-            </a:pPr>
-            <a:r>
-              <a:rPr lang="zh-TW" altLang="en-US" sz="5400" b="1" dirty="0" smtClean="0">
-                <a:solidFill>
-                  <a:srgbClr val="660033"/>
-                </a:solidFill>
-                <a:latin typeface="微軟正黑體" pitchFamily="34" charset="-120"/>
-                <a:ea typeface="微軟正黑體" pitchFamily="34" charset="-120"/>
-              </a:rPr>
-              <a:t>就算</a:t>
-            </a:r>
-            <a:r>
-              <a:rPr lang="zh-TW" altLang="en-US" sz="5400" b="1" dirty="0">
-                <a:solidFill>
-                  <a:srgbClr val="660033"/>
-                </a:solidFill>
-                <a:latin typeface="微軟正黑體" pitchFamily="34" charset="-120"/>
-                <a:ea typeface="微軟正黑體" pitchFamily="34" charset="-120"/>
-              </a:rPr>
-              <a:t>遇到</a:t>
-            </a:r>
-            <a:r>
-              <a:rPr lang="zh-TW" altLang="en-US" sz="5400" b="1" dirty="0" smtClean="0">
-                <a:solidFill>
-                  <a:srgbClr val="660033"/>
-                </a:solidFill>
-                <a:latin typeface="微軟正黑體" pitchFamily="34" charset="-120"/>
-                <a:ea typeface="微軟正黑體" pitchFamily="34" charset="-120"/>
-              </a:rPr>
-              <a:t>暴風雨</a:t>
-            </a:r>
-            <a:endParaRPr lang="en-US" altLang="zh-TW" sz="5400" b="1" dirty="0" smtClean="0">
-              <a:solidFill>
-                <a:srgbClr val="660033"/>
-              </a:solidFill>
-              <a:latin typeface="微軟正黑體" pitchFamily="34" charset="-120"/>
-              <a:ea typeface="微軟正黑體" pitchFamily="34" charset="-120"/>
-            </a:endParaRPr>
-          </a:p>
-          <a:p>
-            <a:pPr algn="ctr">
-              <a:buNone/>
-            </a:pPr>
-            <a:r>
-              <a:rPr lang="zh-TW" altLang="en-US" sz="5400" b="1" dirty="0" smtClean="0">
-                <a:solidFill>
-                  <a:srgbClr val="660033"/>
-                </a:solidFill>
-                <a:latin typeface="微軟正黑體" pitchFamily="34" charset="-120"/>
-                <a:ea typeface="微軟正黑體" pitchFamily="34" charset="-120"/>
-              </a:rPr>
-              <a:t>在</a:t>
-            </a:r>
-            <a:r>
-              <a:rPr lang="zh-TW" altLang="en-US" sz="5400" b="1" dirty="0">
-                <a:solidFill>
-                  <a:srgbClr val="660033"/>
-                </a:solidFill>
-                <a:latin typeface="微軟正黑體" pitchFamily="34" charset="-120"/>
-                <a:ea typeface="微軟正黑體" pitchFamily="34" charset="-120"/>
-              </a:rPr>
-              <a:t>你手中都將變成祝福</a:t>
-            </a:r>
-          </a:p>
-        </p:txBody>
-      </p:sp>
     </p:spTree>
+    <p:extLst>
+      <p:ext uri="{BB962C8B-B14F-4D97-AF65-F5344CB8AC3E}">
+        <p14:creationId xmlns:p14="http://schemas.microsoft.com/office/powerpoint/2010/main" val="3180753866"/>
+      </p:ext>
+    </p:extLst>
   </p:cSld>
   <p:clrMapOvr>
     <a:masterClrMapping/>
@@ -4084,30 +4055,40 @@
       </p:grpSpPr>
       <p:sp>
         <p:nvSpPr>
-          <p:cNvPr id="4" name="標題 3"/>
-          <p:cNvSpPr>
-            <a:spLocks noGrp="1"/>
-          </p:cNvSpPr>
-          <p:nvPr>
-            <p:ph type="title"/>
-          </p:nvPr>
-        </p:nvSpPr>
-        <p:spPr/>
-        <p:txBody>
-          <a:bodyPr/>
-          <a:lstStyle/>
-          <a:p>
-            <a:r>
-              <a:rPr lang="zh-TW" altLang="en-US" b="1" dirty="0" smtClean="0">
+          <p:cNvPr id="5" name="內容版面配置區 4"/>
+          <p:cNvSpPr>
+            <a:spLocks noGrp="1"/>
+          </p:cNvSpPr>
+          <p:nvPr>
+            <p:ph idx="1"/>
+          </p:nvPr>
+        </p:nvSpPr>
+        <p:spPr>
+          <a:xfrm>
+            <a:off x="0" y="2084853"/>
+            <a:ext cx="12192000" cy="2404863"/>
+          </a:xfrm>
+        </p:spPr>
+        <p:txBody>
+          <a:bodyPr anchor="ctr">
+            <a:normAutofit/>
+          </a:bodyPr>
+          <a:lstStyle/>
+          <a:p>
+            <a:pPr algn="ctr">
+              <a:buNone/>
+            </a:pPr>
+            <a:r>
+              <a:rPr lang="zh-TW" altLang="en-US" sz="6600" b="1" dirty="0">
                 <a:solidFill>
                   <a:srgbClr val="660033"/>
                 </a:solidFill>
                 <a:latin typeface="微軟正黑體" pitchFamily="34" charset="-120"/>
                 <a:ea typeface="微軟正黑體" pitchFamily="34" charset="-120"/>
               </a:rPr>
-              <a:t>腳步</a:t>
-            </a:r>
-            <a:endParaRPr lang="zh-TW" altLang="en-US" b="1" dirty="0">
+              <a:t>跟祢行在水面上</a:t>
+            </a:r>
+            <a:endParaRPr lang="en-US" altLang="zh-TW" sz="6600" b="1" dirty="0">
               <a:solidFill>
                 <a:srgbClr val="660033"/>
               </a:solidFill>
@@ -4115,74 +4096,21 @@
               <a:ea typeface="微軟正黑體" pitchFamily="34" charset="-120"/>
             </a:endParaRPr>
           </a:p>
-        </p:txBody>
-      </p:sp>
-      <p:sp>
-        <p:nvSpPr>
-          <p:cNvPr id="5" name="內容版面配置區 4"/>
-          <p:cNvSpPr>
-            <a:spLocks noGrp="1"/>
-          </p:cNvSpPr>
-          <p:nvPr>
-            <p:ph idx="1"/>
-          </p:nvPr>
-        </p:nvSpPr>
-        <p:spPr>
-          <a:xfrm>
-            <a:off x="0" y="1600200"/>
-            <a:ext cx="9144000" cy="4525963"/>
-          </a:xfrm>
-        </p:spPr>
-        <p:txBody>
-          <a:bodyPr>
-            <a:noAutofit/>
-          </a:bodyPr>
-          <a:lstStyle/>
           <a:p>
             <a:pPr algn="ctr">
               <a:buNone/>
             </a:pPr>
             <a:r>
-              <a:rPr lang="zh-TW" altLang="en-US" sz="5400" b="1" dirty="0">
+              <a:rPr lang="zh-TW" altLang="en-US" sz="6600" b="1" dirty="0">
                 <a:solidFill>
                   <a:srgbClr val="660033"/>
                 </a:solidFill>
                 <a:latin typeface="微軟正黑體" pitchFamily="34" charset="-120"/>
                 <a:ea typeface="微軟正黑體" pitchFamily="34" charset="-120"/>
               </a:rPr>
-              <a:t>你的</a:t>
-            </a:r>
-            <a:r>
-              <a:rPr lang="zh-TW" altLang="en-US" sz="5400" b="1" dirty="0" smtClean="0">
-                <a:solidFill>
-                  <a:srgbClr val="660033"/>
-                </a:solidFill>
-                <a:latin typeface="微軟正黑體" pitchFamily="34" charset="-120"/>
-                <a:ea typeface="微軟正黑體" pitchFamily="34" charset="-120"/>
-              </a:rPr>
-              <a:t>腳步 帶</a:t>
-            </a:r>
-            <a:r>
-              <a:rPr lang="zh-TW" altLang="en-US" sz="5400" b="1" dirty="0">
-                <a:solidFill>
-                  <a:srgbClr val="660033"/>
-                </a:solidFill>
-                <a:latin typeface="微軟正黑體" pitchFamily="34" charset="-120"/>
-                <a:ea typeface="微軟正黑體" pitchFamily="34" charset="-120"/>
-              </a:rPr>
-              <a:t>著我的</a:t>
-            </a:r>
-            <a:r>
-              <a:rPr lang="zh-TW" altLang="en-US" sz="5400" b="1" dirty="0" smtClean="0">
-                <a:solidFill>
-                  <a:srgbClr val="660033"/>
-                </a:solidFill>
-                <a:latin typeface="微軟正黑體" pitchFamily="34" charset="-120"/>
-                <a:ea typeface="微軟正黑體" pitchFamily="34" charset="-120"/>
-              </a:rPr>
-              <a:t>腳步</a:t>
-            </a:r>
-            <a:endParaRPr lang="en-US" altLang="zh-TW" sz="5400" b="1" dirty="0" smtClean="0">
+              <a:t>跟祢走在曠野地</a:t>
+            </a:r>
+            <a:endParaRPr lang="en-US" altLang="zh-TW" sz="6600" b="1" dirty="0">
               <a:solidFill>
                 <a:srgbClr val="660033"/>
               </a:solidFill>
@@ -4190,34 +4118,515 @@
               <a:ea typeface="微軟正黑體" pitchFamily="34" charset="-120"/>
             </a:endParaRPr>
           </a:p>
+        </p:txBody>
+      </p:sp>
+      <p:sp>
+        <p:nvSpPr>
+          <p:cNvPr id="3" name="TextBox 2"/>
+          <p:cNvSpPr txBox="1"/>
+          <p:nvPr/>
+        </p:nvSpPr>
+        <p:spPr>
+          <a:xfrm>
+            <a:off x="0" y="5157193"/>
+            <a:ext cx="12192000" cy="666786"/>
+          </a:xfrm>
+          <a:prstGeom prst="rect">
+            <a:avLst/>
+          </a:prstGeom>
+          <a:noFill/>
+        </p:spPr>
+        <p:txBody>
+          <a:bodyPr wrap="square" rtlCol="0">
+            <a:spAutoFit/>
+          </a:bodyPr>
+          <a:lstStyle/>
+          <a:p>
+            <a:pPr algn="ctr"/>
+            <a:r>
+              <a:rPr lang="en-US" sz="3600" b="1" dirty="0">
+                <a:solidFill>
+                  <a:srgbClr val="660033"/>
+                </a:solidFill>
+                <a:latin typeface="Microsoft JhengHei" panose="020B0604030504040204" pitchFamily="34" charset="-120"/>
+                <a:ea typeface="Microsoft JhengHei" panose="020B0604030504040204" pitchFamily="34" charset="-120"/>
+              </a:rPr>
+              <a:t>( </a:t>
+            </a:r>
+            <a:r>
+              <a:rPr lang="zh-CN" altLang="en-US" sz="3600" b="1" dirty="0">
+                <a:solidFill>
+                  <a:srgbClr val="660033"/>
+                </a:solidFill>
+                <a:latin typeface="Microsoft JhengHei" panose="020B0604030504040204" pitchFamily="34" charset="-120"/>
+                <a:ea typeface="Microsoft JhengHei" panose="020B0604030504040204" pitchFamily="34" charset="-120"/>
+              </a:rPr>
+              <a:t>副歌 </a:t>
+            </a:r>
+            <a:r>
+              <a:rPr lang="en-US" altLang="zh-CN" sz="3600" b="1" dirty="0">
+                <a:solidFill>
+                  <a:srgbClr val="660033"/>
+                </a:solidFill>
+                <a:latin typeface="Microsoft JhengHei" panose="020B0604030504040204" pitchFamily="34" charset="-120"/>
+                <a:ea typeface="Microsoft JhengHei" panose="020B0604030504040204" pitchFamily="34" charset="-120"/>
+              </a:rPr>
+              <a:t>1</a:t>
+            </a:r>
+            <a:r>
+              <a:rPr lang="en-US" sz="3600" b="1" dirty="0">
+                <a:solidFill>
+                  <a:srgbClr val="660033"/>
+                </a:solidFill>
+                <a:latin typeface="Microsoft JhengHei" panose="020B0604030504040204" pitchFamily="34" charset="-120"/>
+                <a:ea typeface="Microsoft JhengHei" panose="020B0604030504040204" pitchFamily="34" charset="-120"/>
+              </a:rPr>
+              <a:t> )</a:t>
+            </a:r>
+            <a:endParaRPr lang="vi-VN" sz="3600" b="1" dirty="0">
+              <a:solidFill>
+                <a:srgbClr val="660033"/>
+              </a:solidFill>
+              <a:ea typeface="Microsoft JhengHei" panose="020B0604030504040204" pitchFamily="34" charset="-120"/>
+            </a:endParaRPr>
+          </a:p>
+        </p:txBody>
+      </p:sp>
+    </p:spTree>
+    <p:extLst>
+      <p:ext uri="{BB962C8B-B14F-4D97-AF65-F5344CB8AC3E}">
+        <p14:creationId xmlns:p14="http://schemas.microsoft.com/office/powerpoint/2010/main" val="2590013388"/>
+      </p:ext>
+    </p:extLst>
+  </p:cSld>
+  <p:clrMapOvr>
+    <a:masterClrMapping/>
+  </p:clrMapOvr>
+</p:sld>
+</file>
+
+<file path=ppt/slides/slide7.xml><?xml version="1.0" encoding="utf-8"?>
+<p:sld xmlns:a="http://schemas.openxmlformats.org/drawingml/2006/main" xmlns:r="http://schemas.openxmlformats.org/officeDocument/2006/relationships" xmlns:p="http://schemas.openxmlformats.org/presentationml/2006/main">
+  <p:cSld>
+    <p:spTree>
+      <p:nvGrpSpPr>
+        <p:cNvPr id="1" name=""/>
+        <p:cNvGrpSpPr/>
+        <p:nvPr/>
+      </p:nvGrpSpPr>
+      <p:grpSpPr>
+        <a:xfrm>
+          <a:off x="0" y="0"/>
+          <a:ext cx="0" cy="0"/>
+          <a:chOff x="0" y="0"/>
+          <a:chExt cx="0" cy="0"/>
+        </a:xfrm>
+      </p:grpSpPr>
+      <p:sp>
+        <p:nvSpPr>
+          <p:cNvPr id="5" name="內容版面配置區 4"/>
+          <p:cNvSpPr>
+            <a:spLocks noGrp="1"/>
+          </p:cNvSpPr>
+          <p:nvPr>
+            <p:ph idx="1"/>
+          </p:nvPr>
+        </p:nvSpPr>
+        <p:spPr>
+          <a:xfrm>
+            <a:off x="0" y="2084853"/>
+            <a:ext cx="12192000" cy="2404863"/>
+          </a:xfrm>
+        </p:spPr>
+        <p:txBody>
+          <a:bodyPr anchor="ctr">
+            <a:normAutofit/>
+          </a:bodyPr>
+          <a:lstStyle/>
           <a:p>
             <a:pPr algn="ctr">
               <a:buNone/>
             </a:pPr>
             <a:r>
-              <a:rPr lang="zh-TW" altLang="en-US" sz="5400" b="1" dirty="0" smtClean="0">
+              <a:rPr lang="zh-TW" altLang="en-US" sz="6600" b="1" dirty="0">
                 <a:solidFill>
                   <a:srgbClr val="660033"/>
                 </a:solidFill>
                 <a:latin typeface="微軟正黑體" pitchFamily="34" charset="-120"/>
                 <a:ea typeface="微軟正黑體" pitchFamily="34" charset="-120"/>
               </a:rPr>
-              <a:t>一步一步 都</a:t>
-            </a:r>
-            <a:r>
-              <a:rPr lang="zh-TW" altLang="en-US" sz="5400" b="1" dirty="0">
+              <a:t>曲曲折折我也不在乎</a:t>
+            </a:r>
+          </a:p>
+        </p:txBody>
+      </p:sp>
+      <p:sp>
+        <p:nvSpPr>
+          <p:cNvPr id="3" name="TextBox 2"/>
+          <p:cNvSpPr txBox="1"/>
+          <p:nvPr/>
+        </p:nvSpPr>
+        <p:spPr>
+          <a:xfrm>
+            <a:off x="0" y="5157193"/>
+            <a:ext cx="12192000" cy="666786"/>
+          </a:xfrm>
+          <a:prstGeom prst="rect">
+            <a:avLst/>
+          </a:prstGeom>
+          <a:noFill/>
+        </p:spPr>
+        <p:txBody>
+          <a:bodyPr wrap="square" rtlCol="0">
+            <a:spAutoFit/>
+          </a:bodyPr>
+          <a:lstStyle/>
+          <a:p>
+            <a:pPr algn="ctr"/>
+            <a:r>
+              <a:rPr lang="en-US" sz="3600" b="1" dirty="0">
+                <a:solidFill>
+                  <a:srgbClr val="660033"/>
+                </a:solidFill>
+                <a:latin typeface="Microsoft JhengHei" panose="020B0604030504040204" pitchFamily="34" charset="-120"/>
+                <a:ea typeface="Microsoft JhengHei" panose="020B0604030504040204" pitchFamily="34" charset="-120"/>
+              </a:rPr>
+              <a:t>( </a:t>
+            </a:r>
+            <a:r>
+              <a:rPr lang="zh-CN" altLang="en-US" sz="3600" b="1" dirty="0">
+                <a:solidFill>
+                  <a:srgbClr val="660033"/>
+                </a:solidFill>
+                <a:latin typeface="Microsoft JhengHei" panose="020B0604030504040204" pitchFamily="34" charset="-120"/>
+                <a:ea typeface="Microsoft JhengHei" panose="020B0604030504040204" pitchFamily="34" charset="-120"/>
+              </a:rPr>
+              <a:t>副歌 </a:t>
+            </a:r>
+            <a:r>
+              <a:rPr lang="en-US" altLang="zh-CN" sz="3600" b="1" dirty="0">
+                <a:solidFill>
+                  <a:srgbClr val="660033"/>
+                </a:solidFill>
+                <a:latin typeface="Microsoft JhengHei" panose="020B0604030504040204" pitchFamily="34" charset="-120"/>
+                <a:ea typeface="Microsoft JhengHei" panose="020B0604030504040204" pitchFamily="34" charset="-120"/>
+              </a:rPr>
+              <a:t>1</a:t>
+            </a:r>
+            <a:r>
+              <a:rPr lang="en-US" sz="3600" b="1" dirty="0">
+                <a:solidFill>
+                  <a:srgbClr val="660033"/>
+                </a:solidFill>
+                <a:latin typeface="Microsoft JhengHei" panose="020B0604030504040204" pitchFamily="34" charset="-120"/>
+                <a:ea typeface="Microsoft JhengHei" panose="020B0604030504040204" pitchFamily="34" charset="-120"/>
+              </a:rPr>
+              <a:t> )</a:t>
+            </a:r>
+            <a:endParaRPr lang="vi-VN" sz="3600" b="1" dirty="0">
+              <a:solidFill>
+                <a:srgbClr val="660033"/>
+              </a:solidFill>
+              <a:ea typeface="Microsoft JhengHei" panose="020B0604030504040204" pitchFamily="34" charset="-120"/>
+            </a:endParaRPr>
+          </a:p>
+        </p:txBody>
+      </p:sp>
+    </p:spTree>
+    <p:extLst>
+      <p:ext uri="{BB962C8B-B14F-4D97-AF65-F5344CB8AC3E}">
+        <p14:creationId xmlns:p14="http://schemas.microsoft.com/office/powerpoint/2010/main" val="1964211188"/>
+      </p:ext>
+    </p:extLst>
+  </p:cSld>
+  <p:clrMapOvr>
+    <a:masterClrMapping/>
+  </p:clrMapOvr>
+</p:sld>
+</file>
+
+<file path=ppt/slides/slide8.xml><?xml version="1.0" encoding="utf-8"?>
+<p:sld xmlns:a="http://schemas.openxmlformats.org/drawingml/2006/main" xmlns:r="http://schemas.openxmlformats.org/officeDocument/2006/relationships" xmlns:p="http://schemas.openxmlformats.org/presentationml/2006/main">
+  <p:cSld>
+    <p:spTree>
+      <p:nvGrpSpPr>
+        <p:cNvPr id="1" name=""/>
+        <p:cNvGrpSpPr/>
+        <p:nvPr/>
+      </p:nvGrpSpPr>
+      <p:grpSpPr>
+        <a:xfrm>
+          <a:off x="0" y="0"/>
+          <a:ext cx="0" cy="0"/>
+          <a:chOff x="0" y="0"/>
+          <a:chExt cx="0" cy="0"/>
+        </a:xfrm>
+      </p:grpSpPr>
+      <p:sp>
+        <p:nvSpPr>
+          <p:cNvPr id="5" name="內容版面配置區 4"/>
+          <p:cNvSpPr>
+            <a:spLocks noGrp="1"/>
+          </p:cNvSpPr>
+          <p:nvPr>
+            <p:ph idx="1"/>
+          </p:nvPr>
+        </p:nvSpPr>
+        <p:spPr>
+          <a:xfrm>
+            <a:off x="0" y="2084853"/>
+            <a:ext cx="12192000" cy="2404863"/>
+          </a:xfrm>
+        </p:spPr>
+        <p:txBody>
+          <a:bodyPr anchor="ctr">
+            <a:normAutofit/>
+          </a:bodyPr>
+          <a:lstStyle/>
+          <a:p>
+            <a:pPr algn="ctr">
+              <a:buNone/>
+            </a:pPr>
+            <a:r>
+              <a:rPr lang="zh-TW" altLang="en-US" sz="6600" b="1" dirty="0">
                 <a:solidFill>
                   <a:srgbClr val="660033"/>
                 </a:solidFill>
                 <a:latin typeface="微軟正黑體" pitchFamily="34" charset="-120"/>
                 <a:ea typeface="微軟正黑體" pitchFamily="34" charset="-120"/>
               </a:rPr>
-              <a:t>有祝福</a:t>
-            </a:r>
+              <a:t>我只要更多信靠祢</a:t>
+            </a:r>
+            <a:endParaRPr lang="en-US" altLang="zh-TW" sz="6600" b="1" dirty="0">
+              <a:solidFill>
+                <a:srgbClr val="660033"/>
+              </a:solidFill>
+              <a:latin typeface="微軟正黑體" pitchFamily="34" charset="-120"/>
+              <a:ea typeface="微軟正黑體" pitchFamily="34" charset="-120"/>
+            </a:endParaRPr>
+          </a:p>
+          <a:p>
+            <a:pPr algn="ctr">
+              <a:buNone/>
+            </a:pPr>
+            <a:r>
+              <a:rPr lang="zh-TW" altLang="en-US" sz="6600" b="1" dirty="0">
+                <a:solidFill>
+                  <a:srgbClr val="660033"/>
+                </a:solidFill>
+                <a:latin typeface="微軟正黑體" pitchFamily="34" charset="-120"/>
+                <a:ea typeface="微軟正黑體" pitchFamily="34" charset="-120"/>
+              </a:rPr>
+              <a:t>只要更多順服祢</a:t>
+            </a:r>
+            <a:endParaRPr lang="en-US" altLang="zh-TW" sz="6600" b="1" dirty="0">
+              <a:solidFill>
+                <a:srgbClr val="660033"/>
+              </a:solidFill>
+              <a:latin typeface="微軟正黑體" pitchFamily="34" charset="-120"/>
+              <a:ea typeface="微軟正黑體" pitchFamily="34" charset="-120"/>
+            </a:endParaRPr>
+          </a:p>
+        </p:txBody>
+      </p:sp>
+      <p:sp>
+        <p:nvSpPr>
+          <p:cNvPr id="3" name="TextBox 2"/>
+          <p:cNvSpPr txBox="1"/>
+          <p:nvPr/>
+        </p:nvSpPr>
+        <p:spPr>
+          <a:xfrm>
+            <a:off x="0" y="5157193"/>
+            <a:ext cx="12192000" cy="666786"/>
+          </a:xfrm>
+          <a:prstGeom prst="rect">
+            <a:avLst/>
+          </a:prstGeom>
+          <a:noFill/>
+        </p:spPr>
+        <p:txBody>
+          <a:bodyPr wrap="square" rtlCol="0">
+            <a:spAutoFit/>
+          </a:bodyPr>
+          <a:lstStyle/>
+          <a:p>
+            <a:pPr algn="ctr"/>
+            <a:r>
+              <a:rPr lang="en-US" sz="3600" b="1" dirty="0">
+                <a:solidFill>
+                  <a:srgbClr val="660033"/>
+                </a:solidFill>
+                <a:latin typeface="Microsoft JhengHei" panose="020B0604030504040204" pitchFamily="34" charset="-120"/>
+                <a:ea typeface="Microsoft JhengHei" panose="020B0604030504040204" pitchFamily="34" charset="-120"/>
+              </a:rPr>
+              <a:t>( </a:t>
+            </a:r>
+            <a:r>
+              <a:rPr lang="zh-CN" altLang="en-US" sz="3600" b="1" dirty="0">
+                <a:solidFill>
+                  <a:srgbClr val="660033"/>
+                </a:solidFill>
+                <a:latin typeface="Microsoft JhengHei" panose="020B0604030504040204" pitchFamily="34" charset="-120"/>
+                <a:ea typeface="Microsoft JhengHei" panose="020B0604030504040204" pitchFamily="34" charset="-120"/>
+              </a:rPr>
+              <a:t>副歌</a:t>
+            </a:r>
+            <a:r>
+              <a:rPr lang="en-US" sz="3600" b="1" dirty="0">
+                <a:solidFill>
+                  <a:srgbClr val="660033"/>
+                </a:solidFill>
+                <a:latin typeface="Microsoft JhengHei" panose="020B0604030504040204" pitchFamily="34" charset="-120"/>
+                <a:ea typeface="Microsoft JhengHei" panose="020B0604030504040204" pitchFamily="34" charset="-120"/>
+              </a:rPr>
+              <a:t> 2 )</a:t>
+            </a:r>
+            <a:endParaRPr lang="vi-VN" sz="3600" b="1" dirty="0">
+              <a:solidFill>
+                <a:srgbClr val="660033"/>
+              </a:solidFill>
+              <a:ea typeface="Microsoft JhengHei" panose="020B0604030504040204" pitchFamily="34" charset="-120"/>
+            </a:endParaRPr>
           </a:p>
         </p:txBody>
       </p:sp>
     </p:spTree>
+    <p:extLst>
+      <p:ext uri="{BB962C8B-B14F-4D97-AF65-F5344CB8AC3E}">
+        <p14:creationId xmlns:p14="http://schemas.microsoft.com/office/powerpoint/2010/main" val="3208801559"/>
+      </p:ext>
+    </p:extLst>
+  </p:cSld>
+  <p:clrMapOvr>
+    <a:masterClrMapping/>
+  </p:clrMapOvr>
+</p:sld>
+</file>
+
+<file path=ppt/slides/slide9.xml><?xml version="1.0" encoding="utf-8"?>
+<p:sld xmlns:a="http://schemas.openxmlformats.org/drawingml/2006/main" xmlns:r="http://schemas.openxmlformats.org/officeDocument/2006/relationships" xmlns:p="http://schemas.openxmlformats.org/presentationml/2006/main">
+  <p:cSld>
+    <p:spTree>
+      <p:nvGrpSpPr>
+        <p:cNvPr id="1" name=""/>
+        <p:cNvGrpSpPr/>
+        <p:nvPr/>
+      </p:nvGrpSpPr>
+      <p:grpSpPr>
+        <a:xfrm>
+          <a:off x="0" y="0"/>
+          <a:ext cx="0" cy="0"/>
+          <a:chOff x="0" y="0"/>
+          <a:chExt cx="0" cy="0"/>
+        </a:xfrm>
+      </p:grpSpPr>
+      <p:sp>
+        <p:nvSpPr>
+          <p:cNvPr id="5" name="內容版面配置區 4"/>
+          <p:cNvSpPr>
+            <a:spLocks noGrp="1"/>
+          </p:cNvSpPr>
+          <p:nvPr>
+            <p:ph idx="1"/>
+          </p:nvPr>
+        </p:nvSpPr>
+        <p:spPr>
+          <a:xfrm>
+            <a:off x="0" y="2084853"/>
+            <a:ext cx="12192000" cy="2404863"/>
+          </a:xfrm>
+        </p:spPr>
+        <p:txBody>
+          <a:bodyPr anchor="ctr">
+            <a:normAutofit/>
+          </a:bodyPr>
+          <a:lstStyle/>
+          <a:p>
+            <a:pPr algn="ctr">
+              <a:buNone/>
+            </a:pPr>
+            <a:r>
+              <a:rPr lang="zh-TW" altLang="en-US" sz="6600" b="1" dirty="0">
+                <a:solidFill>
+                  <a:srgbClr val="660033"/>
+                </a:solidFill>
+                <a:latin typeface="微軟正黑體" pitchFamily="34" charset="-120"/>
+                <a:ea typeface="微軟正黑體" pitchFamily="34" charset="-120"/>
+              </a:rPr>
+              <a:t>凡是出於祢的我就默然不語</a:t>
+            </a:r>
+          </a:p>
+        </p:txBody>
+      </p:sp>
+      <p:sp>
+        <p:nvSpPr>
+          <p:cNvPr id="3" name="TextBox 2"/>
+          <p:cNvSpPr txBox="1"/>
+          <p:nvPr/>
+        </p:nvSpPr>
+        <p:spPr>
+          <a:xfrm>
+            <a:off x="0" y="5157193"/>
+            <a:ext cx="12192000" cy="666786"/>
+          </a:xfrm>
+          <a:prstGeom prst="rect">
+            <a:avLst/>
+          </a:prstGeom>
+          <a:noFill/>
+        </p:spPr>
+        <p:txBody>
+          <a:bodyPr wrap="square" rtlCol="0">
+            <a:spAutoFit/>
+          </a:bodyPr>
+          <a:lstStyle/>
+          <a:p>
+            <a:pPr algn="ctr"/>
+            <a:r>
+              <a:rPr lang="en-US" sz="3600" b="1" dirty="0">
+                <a:solidFill>
+                  <a:srgbClr val="660033"/>
+                </a:solidFill>
+                <a:latin typeface="Microsoft JhengHei" panose="020B0604030504040204" pitchFamily="34" charset="-120"/>
+                <a:ea typeface="Microsoft JhengHei" panose="020B0604030504040204" pitchFamily="34" charset="-120"/>
+              </a:rPr>
+              <a:t>( </a:t>
+            </a:r>
+            <a:r>
+              <a:rPr lang="zh-CN" altLang="en-US" sz="3600" b="1" dirty="0">
+                <a:solidFill>
+                  <a:srgbClr val="660033"/>
+                </a:solidFill>
+                <a:latin typeface="Microsoft JhengHei" panose="020B0604030504040204" pitchFamily="34" charset="-120"/>
+                <a:ea typeface="Microsoft JhengHei" panose="020B0604030504040204" pitchFamily="34" charset="-120"/>
+              </a:rPr>
+              <a:t>副歌</a:t>
+            </a:r>
+            <a:r>
+              <a:rPr lang="en-US" sz="3600" b="1" dirty="0">
+                <a:solidFill>
+                  <a:srgbClr val="660033"/>
+                </a:solidFill>
+                <a:latin typeface="Microsoft JhengHei" panose="020B0604030504040204" pitchFamily="34" charset="-120"/>
+                <a:ea typeface="Microsoft JhengHei" panose="020B0604030504040204" pitchFamily="34" charset="-120"/>
+              </a:rPr>
+              <a:t> 2 )</a:t>
+            </a:r>
+            <a:endParaRPr lang="vi-VN" sz="3600" b="1" dirty="0">
+              <a:solidFill>
+                <a:srgbClr val="660033"/>
+              </a:solidFill>
+              <a:ea typeface="Microsoft JhengHei" panose="020B0604030504040204" pitchFamily="34" charset="-120"/>
+            </a:endParaRPr>
+          </a:p>
+        </p:txBody>
+      </p:sp>
+    </p:spTree>
+    <p:extLst>
+      <p:ext uri="{BB962C8B-B14F-4D97-AF65-F5344CB8AC3E}">
+        <p14:creationId xmlns:p14="http://schemas.microsoft.com/office/powerpoint/2010/main" val="1692872589"/>
+      </p:ext>
+    </p:extLst>
   </p:cSld>
   <p:clrMapOvr>
     <a:masterClrMapping/>
